--- a/outputs/I.D._traffic_management.pptx
+++ b/outputs/I.D._traffic_management.pptx
@@ -3103,61 +3103,6 @@
           <a:prstGeom prst="rect">
             <a:avLst/>
           </a:prstGeom>
-          <a:ln>
-            <a:noFill/>
-          </a:ln>
-          <a:effectLst/>
-          <a:gradFill flip="none" rotWithShape="1">
-            <a:gsLst>
-              <a:gs pos="0">
-                <a:srgbClr val="07227A"/>
-              </a:gs>
-              <a:gs pos="85000">
-                <a:srgbClr val="07227A"/>
-              </a:gs>
-              <a:gs pos="100000">
-                <a:srgbClr val="1FCBD9"/>
-              </a:gs>
-            </a:gsLst>
-            <a:lin ang="2700000" scaled="0"/>
-          </a:gradFill>
-        </p:spPr>
-        <p:style>
-          <a:lnRef idx="1">
-            <a:schemeClr val="accent1"/>
-          </a:lnRef>
-          <a:fillRef idx="3">
-            <a:schemeClr val="accent1"/>
-          </a:fillRef>
-          <a:effectRef idx="2">
-            <a:schemeClr val="accent1"/>
-          </a:effectRef>
-          <a:fontRef idx="minor">
-            <a:schemeClr val="lt1"/>
-          </a:fontRef>
-        </p:style>
-        <p:txBody>
-          <a:bodyPr rtlCol="0" anchor="ctr"/>
-          <a:lstStyle/>
-          <a:p>
-            <a:pPr algn="ctr"/>
-          </a:p>
-        </p:txBody>
-      </p:sp>
-      <p:sp>
-        <p:nvSpPr>
-          <p:cNvPr id="3" name="Rectangle 2"/>
-          <p:cNvSpPr/>
-          <p:nvPr/>
-        </p:nvSpPr>
-        <p:spPr>
-          <a:xfrm>
-            <a:off x="0" y="0"/>
-            <a:ext cx="4300000" cy="6858000"/>
-          </a:xfrm>
-          <a:prstGeom prst="rect">
-            <a:avLst/>
-          </a:prstGeom>
           <a:solidFill>
             <a:srgbClr val="061A5E"/>
           </a:solidFill>
@@ -3190,7 +3135,922 @@
       </p:sp>
       <p:sp>
         <p:nvSpPr>
-          <p:cNvPr id="4" name="Rectangle 3"/>
+          <p:cNvPr id="3" name="Rectangle 2"/>
+          <p:cNvSpPr/>
+          <p:nvPr/>
+        </p:nvSpPr>
+        <p:spPr>
+          <a:xfrm>
+            <a:off x="4300000" y="0"/>
+            <a:ext cx="15000" cy="6858000"/>
+          </a:xfrm>
+          <a:prstGeom prst="rect">
+            <a:avLst/>
+          </a:prstGeom>
+          <a:solidFill>
+            <a:srgbClr val="3AEDE5"/>
+          </a:solidFill>
+          <a:ln>
+            <a:noFill/>
+          </a:ln>
+          <a:effectLst/>
+        </p:spPr>
+        <p:style>
+          <a:lnRef idx="1">
+            <a:schemeClr val="accent1"/>
+          </a:lnRef>
+          <a:fillRef idx="3">
+            <a:schemeClr val="accent1"/>
+          </a:fillRef>
+          <a:effectRef idx="2">
+            <a:schemeClr val="accent1"/>
+          </a:effectRef>
+          <a:fontRef idx="minor">
+            <a:schemeClr val="lt1"/>
+          </a:fontRef>
+        </p:style>
+        <p:txBody>
+          <a:bodyPr rtlCol="0" anchor="ctr"/>
+          <a:lstStyle/>
+          <a:p>
+            <a:pPr algn="ctr"/>
+          </a:p>
+        </p:txBody>
+      </p:sp>
+      <p:pic>
+        <p:nvPicPr>
+          <p:cNvPr id="4" name="Picture 3" descr="inside_circle_logo.png"/>
+          <p:cNvPicPr>
+            <a:picLocks noChangeAspect="1"/>
+          </p:cNvPicPr>
+          <p:nvPr/>
+        </p:nvPicPr>
+        <p:blipFill>
+          <a:blip r:embed="rId2"/>
+          <a:stretch>
+            <a:fillRect/>
+          </a:stretch>
+        </p:blipFill>
+        <p:spPr>
+          <a:xfrm>
+            <a:off x="10660000" y="130000"/>
+            <a:ext cx="1302000" cy="420000"/>
+          </a:xfrm>
+          <a:prstGeom prst="rect">
+            <a:avLst/>
+          </a:prstGeom>
+        </p:spPr>
+      </p:pic>
+      <p:sp>
+        <p:nvSpPr>
+          <p:cNvPr id="5" name="TextBox 4"/>
+          <p:cNvSpPr txBox="1"/>
+          <p:nvPr/>
+        </p:nvSpPr>
+        <p:spPr>
+          <a:xfrm>
+            <a:off x="228600" y="260000"/>
+            <a:ext cx="3842800" cy="800000"/>
+          </a:xfrm>
+          <a:prstGeom prst="rect">
+            <a:avLst/>
+          </a:prstGeom>
+          <a:noFill/>
+        </p:spPr>
+        <p:txBody>
+          <a:bodyPr wrap="square" lIns="0" rIns="0" tIns="0" bIns="0">
+            <a:spAutoFit/>
+          </a:bodyPr>
+          <a:lstStyle/>
+          <a:p>
+            <a:pPr algn="l"/>
+            <a:r>
+              <a:rPr sz="4800" b="1" i="0">
+                <a:solidFill>
+                  <a:srgbClr val="3AEDE5"/>
+                </a:solidFill>
+                <a:latin typeface="Alegreya Sans"/>
+              </a:rPr>
+              <a:t>I.D.</a:t>
+            </a:r>
+          </a:p>
+        </p:txBody>
+      </p:sp>
+      <p:sp>
+        <p:nvSpPr>
+          <p:cNvPr id="6" name="TextBox 5"/>
+          <p:cNvSpPr txBox="1"/>
+          <p:nvPr/>
+        </p:nvSpPr>
+        <p:spPr>
+          <a:xfrm>
+            <a:off x="4528600" y="300000"/>
+            <a:ext cx="5963400" cy="800000"/>
+          </a:xfrm>
+          <a:prstGeom prst="rect">
+            <a:avLst/>
+          </a:prstGeom>
+          <a:noFill/>
+        </p:spPr>
+        <p:txBody>
+          <a:bodyPr wrap="square" lIns="0" rIns="0" tIns="0" bIns="0">
+            <a:spAutoFit/>
+          </a:bodyPr>
+          <a:lstStyle/>
+          <a:p>
+            <a:r>
+              <a:rPr sz="2400" b="1" i="0">
+                <a:solidFill>
+                  <a:srgbClr val="FFFFFF"/>
+                </a:solidFill>
+                <a:latin typeface="Alegreya Sans"/>
+              </a:rPr>
+              <a:t>Traffic Manager — Paid Media (alternance)</a:t>
+            </a:r>
+          </a:p>
+          <a:p>
+            <a:pPr>
+              <a:spcBef>
+                <a:spcPts val="200"/>
+              </a:spcBef>
+            </a:pPr>
+            <a:r>
+              <a:rPr sz="1500" b="0" i="1">
+                <a:solidFill>
+                  <a:srgbClr val="3AEDE5"/>
+                </a:solidFill>
+                <a:latin typeface="Alegreya Sans"/>
+              </a:rPr>
+              <a:t>Marketing Digital — Acquisition &amp; Performance</a:t>
+            </a:r>
+          </a:p>
+        </p:txBody>
+      </p:sp>
+      <p:sp>
+        <p:nvSpPr>
+          <p:cNvPr id="7" name="TextBox 6"/>
+          <p:cNvSpPr txBox="1"/>
+          <p:nvPr/>
+        </p:nvSpPr>
+        <p:spPr>
+          <a:xfrm>
+            <a:off x="228600" y="1180000"/>
+            <a:ext cx="3842800" cy="5318000"/>
+          </a:xfrm>
+          <a:prstGeom prst="rect">
+            <a:avLst/>
+          </a:prstGeom>
+          <a:noFill/>
+        </p:spPr>
+        <p:txBody>
+          <a:bodyPr wrap="square" lIns="0" rIns="0" tIns="0" bIns="0">
+            <a:spAutoFit/>
+          </a:bodyPr>
+          <a:lstStyle/>
+          <a:p>
+            <a:pPr algn="l">
+              <a:spcAft>
+                <a:spcPts val="300"/>
+              </a:spcAft>
+            </a:pPr>
+            <a:r>
+              <a:rPr sz="1300" b="1" i="0">
+                <a:solidFill>
+                  <a:srgbClr val="3AEDE5"/>
+                </a:solidFill>
+                <a:latin typeface="Alegreya Sans"/>
+              </a:rPr>
+              <a:t>DOMAINES D'EXPERTISE</a:t>
+            </a:r>
+          </a:p>
+          <a:p>
+            <a:pPr algn="l">
+              <a:spcAft>
+                <a:spcPts val="100"/>
+              </a:spcAft>
+            </a:pPr>
+            <a:r>
+              <a:rPr sz="1200" b="1" i="0">
+                <a:solidFill>
+                  <a:srgbClr val="3AEDE5"/>
+                </a:solidFill>
+                <a:latin typeface="Alegreya Sans"/>
+              </a:rPr>
+              <a:t>•  </a:t>
+            </a:r>
+            <a:r>
+              <a:rPr sz="1200" b="0" i="0">
+                <a:solidFill>
+                  <a:srgbClr val="FFFFFF"/>
+                </a:solidFill>
+                <a:latin typeface="Alegreya Sans"/>
+              </a:rPr>
+              <a:t>Traffic Management</a:t>
+            </a:r>
+          </a:p>
+          <a:p>
+            <a:pPr algn="l">
+              <a:spcAft>
+                <a:spcPts val="100"/>
+              </a:spcAft>
+            </a:pPr>
+            <a:r>
+              <a:rPr sz="1200" b="1" i="0">
+                <a:solidFill>
+                  <a:srgbClr val="3AEDE5"/>
+                </a:solidFill>
+                <a:latin typeface="Alegreya Sans"/>
+              </a:rPr>
+              <a:t>•  </a:t>
+            </a:r>
+            <a:r>
+              <a:rPr sz="1200" b="0" i="0">
+                <a:solidFill>
+                  <a:srgbClr val="FFFFFF"/>
+                </a:solidFill>
+                <a:latin typeface="Alegreya Sans"/>
+              </a:rPr>
+              <a:t>Paid Media (Meta, TikTok, Pinterest)</a:t>
+            </a:r>
+          </a:p>
+          <a:p>
+            <a:pPr algn="l">
+              <a:spcAft>
+                <a:spcPts val="100"/>
+              </a:spcAft>
+            </a:pPr>
+            <a:r>
+              <a:rPr sz="1200" b="1" i="0">
+                <a:solidFill>
+                  <a:srgbClr val="3AEDE5"/>
+                </a:solidFill>
+                <a:latin typeface="Alegreya Sans"/>
+              </a:rPr>
+              <a:t>•  </a:t>
+            </a:r>
+            <a:r>
+              <a:rPr sz="1200" b="0" i="0">
+                <a:solidFill>
+                  <a:srgbClr val="FFFFFF"/>
+                </a:solidFill>
+                <a:latin typeface="Alegreya Sans"/>
+              </a:rPr>
+              <a:t>E-commerce (Shopify)</a:t>
+            </a:r>
+          </a:p>
+          <a:p>
+            <a:pPr algn="l">
+              <a:spcAft>
+                <a:spcPts val="100"/>
+              </a:spcAft>
+            </a:pPr>
+            <a:r>
+              <a:rPr sz="1200" b="1" i="0">
+                <a:solidFill>
+                  <a:srgbClr val="3AEDE5"/>
+                </a:solidFill>
+                <a:latin typeface="Alegreya Sans"/>
+              </a:rPr>
+              <a:t>•  </a:t>
+            </a:r>
+            <a:r>
+              <a:rPr sz="1200" b="0" i="0">
+                <a:solidFill>
+                  <a:srgbClr val="FFFFFF"/>
+                </a:solidFill>
+                <a:latin typeface="Alegreya Sans"/>
+              </a:rPr>
+              <a:t>Analytics (GA, reporting KPI)</a:t>
+            </a:r>
+          </a:p>
+          <a:p>
+            <a:pPr algn="l">
+              <a:spcAft>
+                <a:spcPts val="100"/>
+              </a:spcAft>
+            </a:pPr>
+            <a:r>
+              <a:rPr sz="1200" b="1" i="0">
+                <a:solidFill>
+                  <a:srgbClr val="3AEDE5"/>
+                </a:solidFill>
+                <a:latin typeface="Alegreya Sans"/>
+              </a:rPr>
+              <a:t>•  </a:t>
+            </a:r>
+            <a:r>
+              <a:rPr sz="1200" b="0" i="0">
+                <a:solidFill>
+                  <a:srgbClr val="FFFFFF"/>
+                </a:solidFill>
+                <a:latin typeface="Alegreya Sans"/>
+              </a:rPr>
+              <a:t>Emailing (Mailjet)</a:t>
+            </a:r>
+          </a:p>
+          <a:p>
+            <a:pPr algn="l">
+              <a:spcBef>
+                <a:spcPts val="600"/>
+              </a:spcBef>
+              <a:spcAft>
+                <a:spcPts val="300"/>
+              </a:spcAft>
+            </a:pPr>
+            <a:r>
+              <a:rPr sz="1300" b="1" i="0">
+                <a:solidFill>
+                  <a:srgbClr val="3AEDE5"/>
+                </a:solidFill>
+                <a:latin typeface="Alegreya Sans"/>
+              </a:rPr>
+              <a:t>LANGUES</a:t>
+            </a:r>
+          </a:p>
+          <a:p>
+            <a:pPr algn="l">
+              <a:spcAft>
+                <a:spcPts val="100"/>
+              </a:spcAft>
+            </a:pPr>
+            <a:r>
+              <a:rPr sz="1200" b="1" i="0">
+                <a:solidFill>
+                  <a:srgbClr val="3AEDE5"/>
+                </a:solidFill>
+                <a:latin typeface="Alegreya Sans"/>
+              </a:rPr>
+              <a:t>•  </a:t>
+            </a:r>
+            <a:r>
+              <a:rPr sz="1200" b="0" i="0">
+                <a:solidFill>
+                  <a:srgbClr val="FFFFFF"/>
+                </a:solidFill>
+                <a:latin typeface="Alegreya Sans"/>
+              </a:rPr>
+              <a:t>Français — Langue maternelle</a:t>
+            </a:r>
+          </a:p>
+          <a:p>
+            <a:pPr algn="l">
+              <a:spcAft>
+                <a:spcPts val="100"/>
+              </a:spcAft>
+            </a:pPr>
+            <a:r>
+              <a:rPr sz="1200" b="1" i="0">
+                <a:solidFill>
+                  <a:srgbClr val="3AEDE5"/>
+                </a:solidFill>
+                <a:latin typeface="Alegreya Sans"/>
+              </a:rPr>
+              <a:t>•  </a:t>
+            </a:r>
+            <a:r>
+              <a:rPr sz="1200" b="0" i="0">
+                <a:solidFill>
+                  <a:srgbClr val="FFFFFF"/>
+                </a:solidFill>
+                <a:latin typeface="Alegreya Sans"/>
+              </a:rPr>
+              <a:t>Anglais — B2</a:t>
+            </a:r>
+          </a:p>
+          <a:p>
+            <a:pPr algn="l">
+              <a:spcBef>
+                <a:spcPts val="600"/>
+              </a:spcBef>
+              <a:spcAft>
+                <a:spcPts val="300"/>
+              </a:spcAft>
+            </a:pPr>
+            <a:r>
+              <a:rPr sz="1300" b="1" i="0">
+                <a:solidFill>
+                  <a:srgbClr val="3AEDE5"/>
+                </a:solidFill>
+                <a:latin typeface="Alegreya Sans"/>
+              </a:rPr>
+              <a:t>FORMATION &amp; CERTIFICATIONS</a:t>
+            </a:r>
+          </a:p>
+          <a:p>
+            <a:pPr algn="l">
+              <a:spcAft>
+                <a:spcPts val="100"/>
+              </a:spcAft>
+            </a:pPr>
+            <a:r>
+              <a:rPr sz="1200" b="1" i="0">
+                <a:solidFill>
+                  <a:srgbClr val="3AEDE5"/>
+                </a:solidFill>
+                <a:latin typeface="Alegreya Sans"/>
+              </a:rPr>
+              <a:t>2025 — 2027  </a:t>
+            </a:r>
+            <a:r>
+              <a:rPr sz="1200" b="1" i="0">
+                <a:solidFill>
+                  <a:srgbClr val="FFFFFF"/>
+                </a:solidFill>
+                <a:latin typeface="Alegreya Sans"/>
+              </a:rPr>
+              <a:t>EM Normandie Business School</a:t>
+            </a:r>
+          </a:p>
+          <a:p>
+            <a:pPr algn="l">
+              <a:spcAft>
+                <a:spcPts val="300"/>
+              </a:spcAft>
+            </a:pPr>
+            <a:r>
+              <a:rPr sz="1200" b="0" i="1">
+                <a:solidFill>
+                  <a:srgbClr val="CCD6E8"/>
+                </a:solidFill>
+                <a:latin typeface="Alegreya Sans"/>
+              </a:rPr>
+              <a:t>Master Programme Grande École, Marketing…</a:t>
+            </a:r>
+          </a:p>
+          <a:p>
+            <a:pPr algn="l">
+              <a:spcAft>
+                <a:spcPts val="100"/>
+              </a:spcAft>
+            </a:pPr>
+            <a:r>
+              <a:rPr sz="1200" b="1" i="0">
+                <a:solidFill>
+                  <a:srgbClr val="3AEDE5"/>
+                </a:solidFill>
+                <a:latin typeface="Alegreya Sans"/>
+              </a:rPr>
+              <a:t>2022 — 2025  </a:t>
+            </a:r>
+            <a:r>
+              <a:rPr sz="1200" b="1" i="0">
+                <a:solidFill>
+                  <a:srgbClr val="FFFFFF"/>
+                </a:solidFill>
+                <a:latin typeface="Alegreya Sans"/>
+              </a:rPr>
+              <a:t>EM Normandie</a:t>
+            </a:r>
+          </a:p>
+          <a:p>
+            <a:pPr algn="l">
+              <a:spcAft>
+                <a:spcPts val="300"/>
+              </a:spcAft>
+            </a:pPr>
+            <a:r>
+              <a:rPr sz="1200" b="0" i="1">
+                <a:solidFill>
+                  <a:srgbClr val="CCD6E8"/>
+                </a:solidFill>
+                <a:latin typeface="Alegreya Sans"/>
+              </a:rPr>
+              <a:t>Bachelor Management International, Marke…</a:t>
+            </a:r>
+          </a:p>
+          <a:p>
+            <a:pPr algn="l">
+              <a:spcAft>
+                <a:spcPts val="100"/>
+              </a:spcAft>
+            </a:pPr>
+            <a:r>
+              <a:rPr sz="1200" b="1" i="0">
+                <a:solidFill>
+                  <a:srgbClr val="3AEDE5"/>
+                </a:solidFill>
+                <a:latin typeface="Alegreya Sans"/>
+              </a:rPr>
+              <a:t>2024  </a:t>
+            </a:r>
+            <a:r>
+              <a:rPr sz="1200" b="1" i="0">
+                <a:solidFill>
+                  <a:srgbClr val="FFFFFF"/>
+                </a:solidFill>
+                <a:latin typeface="Alegreya Sans"/>
+              </a:rPr>
+              <a:t>HubSpot Academy</a:t>
+            </a:r>
+          </a:p>
+          <a:p>
+            <a:pPr algn="l">
+              <a:spcAft>
+                <a:spcPts val="300"/>
+              </a:spcAft>
+            </a:pPr>
+            <a:r>
+              <a:rPr sz="1200" b="0" i="1">
+                <a:solidFill>
+                  <a:srgbClr val="CCD6E8"/>
+                </a:solidFill>
+                <a:latin typeface="Alegreya Sans"/>
+              </a:rPr>
+              <a:t>Certification Inbound Marketing</a:t>
+            </a:r>
+          </a:p>
+          <a:p>
+            <a:pPr algn="l">
+              <a:spcAft>
+                <a:spcPts val="100"/>
+              </a:spcAft>
+            </a:pPr>
+            <a:r>
+              <a:rPr sz="1200" b="1" i="0">
+                <a:solidFill>
+                  <a:srgbClr val="3AEDE5"/>
+                </a:solidFill>
+                <a:latin typeface="Alegreya Sans"/>
+              </a:rPr>
+              <a:t>En cours  </a:t>
+            </a:r>
+            <a:r>
+              <a:rPr sz="1200" b="1" i="0">
+                <a:solidFill>
+                  <a:srgbClr val="FFFFFF"/>
+                </a:solidFill>
+                <a:latin typeface="Alegreya Sans"/>
+              </a:rPr>
+              <a:t>Pinterest</a:t>
+            </a:r>
+          </a:p>
+          <a:p>
+            <a:pPr algn="l">
+              <a:spcAft>
+                <a:spcPts val="300"/>
+              </a:spcAft>
+            </a:pPr>
+            <a:r>
+              <a:rPr sz="1200" b="0" i="1">
+                <a:solidFill>
+                  <a:srgbClr val="CCD6E8"/>
+                </a:solidFill>
+                <a:latin typeface="Alegreya Sans"/>
+              </a:rPr>
+              <a:t>Certification Pinterest Media Buyer</a:t>
+            </a:r>
+          </a:p>
+        </p:txBody>
+      </p:sp>
+      <p:sp>
+        <p:nvSpPr>
+          <p:cNvPr id="8" name="TextBox 7"/>
+          <p:cNvSpPr txBox="1"/>
+          <p:nvPr/>
+        </p:nvSpPr>
+        <p:spPr>
+          <a:xfrm>
+            <a:off x="4528600" y="1180000"/>
+            <a:ext cx="7434800" cy="5318000"/>
+          </a:xfrm>
+          <a:prstGeom prst="rect">
+            <a:avLst/>
+          </a:prstGeom>
+          <a:noFill/>
+        </p:spPr>
+        <p:txBody>
+          <a:bodyPr wrap="square" lIns="0" rIns="0" tIns="0" bIns="0">
+            <a:spAutoFit/>
+          </a:bodyPr>
+          <a:lstStyle/>
+          <a:p>
+            <a:pPr algn="l">
+              <a:spcAft>
+                <a:spcPts val="300"/>
+              </a:spcAft>
+            </a:pPr>
+            <a:r>
+              <a:rPr sz="1300" b="1" i="0">
+                <a:solidFill>
+                  <a:srgbClr val="3AEDE5"/>
+                </a:solidFill>
+                <a:latin typeface="Alegreya Sans"/>
+              </a:rPr>
+              <a:t>RÉSUMÉ</a:t>
+            </a:r>
+          </a:p>
+          <a:p>
+            <a:pPr algn="l">
+              <a:spcAft>
+                <a:spcPts val="300"/>
+              </a:spcAft>
+            </a:pPr>
+            <a:r>
+              <a:rPr sz="1200" b="0" i="0">
+                <a:solidFill>
+                  <a:srgbClr val="FFFFFF"/>
+                </a:solidFill>
+                <a:latin typeface="Alegreya Sans"/>
+              </a:rPr>
+              <a:t>Étudiante en Master 1 Programme Grande École (spécialisation innovation en marketing digital et IA) à l'EM Normandie Business School. Je recherche une alternance en traffic management, paid media et a…</a:t>
+            </a:r>
+          </a:p>
+          <a:p>
+            <a:pPr algn="l">
+              <a:spcBef>
+                <a:spcPts val="600"/>
+              </a:spcBef>
+              <a:spcAft>
+                <a:spcPts val="300"/>
+              </a:spcAft>
+            </a:pPr>
+            <a:r>
+              <a:rPr sz="1300" b="1" i="0">
+                <a:solidFill>
+                  <a:srgbClr val="3AEDE5"/>
+                </a:solidFill>
+                <a:latin typeface="Alegreya Sans"/>
+              </a:rPr>
+              <a:t>EXPÉRIENCE PROFESSIONNELLE</a:t>
+            </a:r>
+          </a:p>
+          <a:p>
+            <a:pPr algn="l">
+              <a:spcAft>
+                <a:spcPts val="100"/>
+              </a:spcAft>
+            </a:pPr>
+            <a:r>
+              <a:rPr sz="1200" b="1" i="0">
+                <a:solidFill>
+                  <a:srgbClr val="3AEDE5"/>
+                </a:solidFill>
+                <a:latin typeface="Alegreya Sans"/>
+              </a:rPr>
+              <a:t>▸ </a:t>
+            </a:r>
+            <a:r>
+              <a:rPr sz="1200" b="1" i="0">
+                <a:solidFill>
+                  <a:srgbClr val="FFFFFF"/>
+                </a:solidFill>
+                <a:latin typeface="Alegreya Sans"/>
+              </a:rPr>
+              <a:t>Hobbynote (agence média, Lille)</a:t>
+            </a:r>
+            <a:r>
+              <a:rPr sz="1200" b="0" i="0">
+                <a:solidFill>
+                  <a:srgbClr val="FFFFFF"/>
+                </a:solidFill>
+                <a:latin typeface="Alegreya Sans"/>
+              </a:rPr>
+              <a:t> — Stage puis alternance — Traffic Management</a:t>
+            </a:r>
+            <a:r>
+              <a:rPr sz="1200" b="0" i="1">
+                <a:solidFill>
+                  <a:srgbClr val="3AEDE5"/>
+                </a:solidFill>
+                <a:latin typeface="Alegreya Sans"/>
+              </a:rPr>
+              <a:t>  (2025 — en cours)</a:t>
+            </a:r>
+          </a:p>
+          <a:p>
+            <a:pPr algn="l" lvl="1">
+              <a:spcAft>
+                <a:spcPts val="100"/>
+              </a:spcAft>
+            </a:pPr>
+            <a:r>
+              <a:rPr sz="1200" b="1" i="0">
+                <a:solidFill>
+                  <a:srgbClr val="3AEDE5"/>
+                </a:solidFill>
+                <a:latin typeface="Alegreya Sans"/>
+              </a:rPr>
+              <a:t>•  </a:t>
+            </a:r>
+            <a:r>
+              <a:rPr sz="1200" b="0" i="0">
+                <a:solidFill>
+                  <a:srgbClr val="FFFFFF"/>
+                </a:solidFill>
+                <a:latin typeface="Alegreya Sans"/>
+              </a:rPr>
+              <a:t>Lancement et optimisation de campagnes Social Ads sur Meta Ads, TikTok Ads et Pinterest Ads ; mise en place des stratégies d'acquisition sel…</a:t>
+            </a:r>
+          </a:p>
+          <a:p>
+            <a:pPr algn="l" lvl="1">
+              <a:spcAft>
+                <a:spcPts val="100"/>
+              </a:spcAft>
+            </a:pPr>
+            <a:r>
+              <a:rPr sz="1200" b="1" i="0">
+                <a:solidFill>
+                  <a:srgbClr val="3AEDE5"/>
+                </a:solidFill>
+                <a:latin typeface="Alegreya Sans"/>
+              </a:rPr>
+              <a:t>•  </a:t>
+            </a:r>
+            <a:r>
+              <a:rPr sz="1200" b="0" i="0">
+                <a:solidFill>
+                  <a:srgbClr val="FFFFFF"/>
+                </a:solidFill>
+                <a:latin typeface="Alegreya Sans"/>
+              </a:rPr>
+              <a:t>Suivi et analyse des KPI ; bilans de campagnes ; veille concurrentielle &amp; benchmarks ; mise à jour du plan média.</a:t>
+            </a:r>
+          </a:p>
+          <a:p>
+            <a:pPr algn="l">
+              <a:spcAft>
+                <a:spcPts val="100"/>
+              </a:spcAft>
+            </a:pPr>
+            <a:r>
+              <a:rPr sz="1200" b="1" i="0">
+                <a:solidFill>
+                  <a:srgbClr val="3AEDE5"/>
+                </a:solidFill>
+                <a:latin typeface="Alegreya Sans"/>
+              </a:rPr>
+              <a:t>▸ </a:t>
+            </a:r>
+            <a:r>
+              <a:rPr sz="1200" b="1" i="0">
+                <a:solidFill>
+                  <a:srgbClr val="FFFFFF"/>
+                </a:solidFill>
+                <a:latin typeface="Alegreya Sans"/>
+              </a:rPr>
+              <a:t>Projet école</a:t>
+            </a:r>
+            <a:r>
+              <a:rPr sz="1200" b="0" i="0">
+                <a:solidFill>
+                  <a:srgbClr val="FFFFFF"/>
+                </a:solidFill>
+                <a:latin typeface="Alegreya Sans"/>
+              </a:rPr>
+              <a:t> — E-commerce</a:t>
+            </a:r>
+            <a:r>
+              <a:rPr sz="1200" b="0" i="1">
+                <a:solidFill>
+                  <a:srgbClr val="3AEDE5"/>
+                </a:solidFill>
+                <a:latin typeface="Alegreya Sans"/>
+              </a:rPr>
+              <a:t>  (2025)</a:t>
+            </a:r>
+          </a:p>
+          <a:p>
+            <a:pPr algn="l" lvl="1">
+              <a:spcAft>
+                <a:spcPts val="100"/>
+              </a:spcAft>
+            </a:pPr>
+            <a:r>
+              <a:rPr sz="1200" b="1" i="0">
+                <a:solidFill>
+                  <a:srgbClr val="3AEDE5"/>
+                </a:solidFill>
+                <a:latin typeface="Alegreya Sans"/>
+              </a:rPr>
+              <a:t>•  </a:t>
+            </a:r>
+            <a:r>
+              <a:rPr sz="1200" b="0" i="0">
+                <a:solidFill>
+                  <a:srgbClr val="FFFFFF"/>
+                </a:solidFill>
+                <a:latin typeface="Alegreya Sans"/>
+              </a:rPr>
+              <a:t>Création d'un site e-commerce sous Shopify ; optimisation ergonomique ; newsletter Mailjet ; stratégies de développement.</a:t>
+            </a:r>
+          </a:p>
+          <a:p>
+            <a:pPr algn="l">
+              <a:spcAft>
+                <a:spcPts val="100"/>
+              </a:spcAft>
+            </a:pPr>
+            <a:r>
+              <a:rPr sz="1200" b="1" i="0">
+                <a:solidFill>
+                  <a:srgbClr val="3AEDE5"/>
+                </a:solidFill>
+                <a:latin typeface="Alegreya Sans"/>
+              </a:rPr>
+              <a:t>▸ </a:t>
+            </a:r>
+            <a:r>
+              <a:rPr sz="1200" b="1" i="0">
+                <a:solidFill>
+                  <a:srgbClr val="FFFFFF"/>
+                </a:solidFill>
+                <a:latin typeface="Alegreya Sans"/>
+              </a:rPr>
+              <a:t>Projet personnel</a:t>
+            </a:r>
+            <a:r>
+              <a:rPr sz="1200" b="0" i="0">
+                <a:solidFill>
+                  <a:srgbClr val="FFFFFF"/>
+                </a:solidFill>
+                <a:latin typeface="Alegreya Sans"/>
+              </a:rPr>
+              <a:t> — E-commerce</a:t>
+            </a:r>
+            <a:r>
+              <a:rPr sz="1200" b="0" i="1">
+                <a:solidFill>
+                  <a:srgbClr val="3AEDE5"/>
+                </a:solidFill>
+                <a:latin typeface="Alegreya Sans"/>
+              </a:rPr>
+              <a:t>  (2024)</a:t>
+            </a:r>
+          </a:p>
+          <a:p>
+            <a:pPr algn="l" lvl="1">
+              <a:spcAft>
+                <a:spcPts val="100"/>
+              </a:spcAft>
+            </a:pPr>
+            <a:r>
+              <a:rPr sz="1200" b="1" i="0">
+                <a:solidFill>
+                  <a:srgbClr val="3AEDE5"/>
+                </a:solidFill>
+                <a:latin typeface="Alegreya Sans"/>
+              </a:rPr>
+              <a:t>•  </a:t>
+            </a:r>
+            <a:r>
+              <a:rPr sz="1200" b="0" i="0">
+                <a:solidFill>
+                  <a:srgbClr val="FFFFFF"/>
+                </a:solidFill>
+                <a:latin typeface="Alegreya Sans"/>
+              </a:rPr>
+              <a:t>Création et gestion d'un site e-commerce ; mise en ligne des produits ; publicités digitales ; suivi via Google Analytics.</a:t>
+            </a:r>
+          </a:p>
+          <a:p>
+            <a:pPr algn="l">
+              <a:spcAft>
+                <a:spcPts val="100"/>
+              </a:spcAft>
+            </a:pPr>
+            <a:r>
+              <a:rPr sz="1200" b="1" i="0">
+                <a:solidFill>
+                  <a:srgbClr val="3AEDE5"/>
+                </a:solidFill>
+                <a:latin typeface="Alegreya Sans"/>
+              </a:rPr>
+              <a:t>▸ </a:t>
+            </a:r>
+            <a:r>
+              <a:rPr sz="1200" b="1" i="0">
+                <a:solidFill>
+                  <a:srgbClr val="FFFFFF"/>
+                </a:solidFill>
+                <a:latin typeface="Alegreya Sans"/>
+              </a:rPr>
+              <a:t>OMB Tourisme (Le Havre)</a:t>
+            </a:r>
+            <a:r>
+              <a:rPr sz="1200" b="0" i="0">
+                <a:solidFill>
+                  <a:srgbClr val="FFFFFF"/>
+                </a:solidFill>
+                <a:latin typeface="Alegreya Sans"/>
+              </a:rPr>
+              <a:t> — Stage — Administration &amp; comptabilité</a:t>
+            </a:r>
+            <a:r>
+              <a:rPr sz="1200" b="0" i="1">
+                <a:solidFill>
+                  <a:srgbClr val="3AEDE5"/>
+                </a:solidFill>
+                <a:latin typeface="Alegreya Sans"/>
+              </a:rPr>
+              <a:t>  (2023)</a:t>
+            </a:r>
+          </a:p>
+        </p:txBody>
+      </p:sp>
+      <p:sp>
+        <p:nvSpPr>
+          <p:cNvPr id="9" name="Rectangle 8"/>
           <p:cNvSpPr/>
           <p:nvPr/>
         </p:nvSpPr>
@@ -3232,877 +4092,6 @@
           </a:p>
         </p:txBody>
       </p:sp>
-      <p:pic>
-        <p:nvPicPr>
-          <p:cNvPr id="5" name="Picture 4" descr="inside_circle_logo.png"/>
-          <p:cNvPicPr>
-            <a:picLocks noChangeAspect="1"/>
-          </p:cNvPicPr>
-          <p:nvPr/>
-        </p:nvPicPr>
-        <p:blipFill>
-          <a:blip r:embed="rId2"/>
-          <a:stretch>
-            <a:fillRect/>
-          </a:stretch>
-        </p:blipFill>
-        <p:spPr>
-          <a:xfrm>
-            <a:off x="10660000" y="130000"/>
-            <a:ext cx="1302000" cy="420000"/>
-          </a:xfrm>
-          <a:prstGeom prst="rect">
-            <a:avLst/>
-          </a:prstGeom>
-        </p:spPr>
-      </p:pic>
-      <p:sp>
-        <p:nvSpPr>
-          <p:cNvPr id="6" name="TextBox 5"/>
-          <p:cNvSpPr txBox="1"/>
-          <p:nvPr/>
-        </p:nvSpPr>
-        <p:spPr>
-          <a:xfrm>
-            <a:off x="228600" y="260000"/>
-            <a:ext cx="3842800" cy="800000"/>
-          </a:xfrm>
-          <a:prstGeom prst="rect">
-            <a:avLst/>
-          </a:prstGeom>
-          <a:noFill/>
-        </p:spPr>
-        <p:txBody>
-          <a:bodyPr wrap="square" lIns="0" rIns="0" tIns="0" bIns="0">
-            <a:spAutoFit/>
-          </a:bodyPr>
-          <a:lstStyle/>
-          <a:p>
-            <a:pPr algn="l"/>
-            <a:r>
-              <a:rPr sz="4800" b="1" i="0">
-                <a:solidFill>
-                  <a:srgbClr val="3AEDE5"/>
-                </a:solidFill>
-                <a:latin typeface="Alegreya Sans"/>
-              </a:rPr>
-              <a:t>I.D.</a:t>
-            </a:r>
-          </a:p>
-        </p:txBody>
-      </p:sp>
-      <p:sp>
-        <p:nvSpPr>
-          <p:cNvPr id="7" name="TextBox 6"/>
-          <p:cNvSpPr txBox="1"/>
-          <p:nvPr/>
-        </p:nvSpPr>
-        <p:spPr>
-          <a:xfrm>
-            <a:off x="4528600" y="300000"/>
-            <a:ext cx="5963400" cy="800000"/>
-          </a:xfrm>
-          <a:prstGeom prst="rect">
-            <a:avLst/>
-          </a:prstGeom>
-          <a:noFill/>
-        </p:spPr>
-        <p:txBody>
-          <a:bodyPr wrap="square" lIns="0" rIns="0" tIns="0" bIns="0">
-            <a:spAutoFit/>
-          </a:bodyPr>
-          <a:lstStyle/>
-          <a:p>
-            <a:r>
-              <a:rPr sz="2400" b="1" i="0">
-                <a:solidFill>
-                  <a:srgbClr val="FFFFFF"/>
-                </a:solidFill>
-                <a:latin typeface="Alegreya Sans"/>
-              </a:rPr>
-              <a:t>Traffic Manager — Paid Media (alternance)</a:t>
-            </a:r>
-          </a:p>
-          <a:p>
-            <a:pPr>
-              <a:spcBef>
-                <a:spcPts val="200"/>
-              </a:spcBef>
-            </a:pPr>
-            <a:r>
-              <a:rPr sz="1500" b="0" i="1">
-                <a:solidFill>
-                  <a:srgbClr val="3AEDE5"/>
-                </a:solidFill>
-                <a:latin typeface="Alegreya Sans"/>
-              </a:rPr>
-              <a:t>Marketing Digital — Acquisition &amp; Performance</a:t>
-            </a:r>
-          </a:p>
-        </p:txBody>
-      </p:sp>
-      <p:sp>
-        <p:nvSpPr>
-          <p:cNvPr id="8" name="TextBox 7"/>
-          <p:cNvSpPr txBox="1"/>
-          <p:nvPr/>
-        </p:nvSpPr>
-        <p:spPr>
-          <a:xfrm>
-            <a:off x="228600" y="1180000"/>
-            <a:ext cx="3842800" cy="5318000"/>
-          </a:xfrm>
-          <a:prstGeom prst="rect">
-            <a:avLst/>
-          </a:prstGeom>
-          <a:noFill/>
-        </p:spPr>
-        <p:txBody>
-          <a:bodyPr wrap="square" lIns="0" rIns="0" tIns="0" bIns="0">
-            <a:spAutoFit/>
-          </a:bodyPr>
-          <a:lstStyle/>
-          <a:p>
-            <a:pPr algn="l">
-              <a:spcAft>
-                <a:spcPts val="300"/>
-              </a:spcAft>
-            </a:pPr>
-            <a:r>
-              <a:rPr sz="1300" b="1" i="0">
-                <a:solidFill>
-                  <a:srgbClr val="3AEDE5"/>
-                </a:solidFill>
-                <a:latin typeface="Alegreya Sans"/>
-              </a:rPr>
-              <a:t>DOMAINES D'EXPERTISE</a:t>
-            </a:r>
-          </a:p>
-          <a:p>
-            <a:pPr algn="l">
-              <a:spcAft>
-                <a:spcPts val="100"/>
-              </a:spcAft>
-            </a:pPr>
-            <a:r>
-              <a:rPr sz="1200" b="1" i="0">
-                <a:solidFill>
-                  <a:srgbClr val="3AEDE5"/>
-                </a:solidFill>
-                <a:latin typeface="Alegreya Sans"/>
-              </a:rPr>
-              <a:t>•  </a:t>
-            </a:r>
-            <a:r>
-              <a:rPr sz="1200" b="0" i="0">
-                <a:solidFill>
-                  <a:srgbClr val="FFFFFF"/>
-                </a:solidFill>
-                <a:latin typeface="Alegreya Sans"/>
-              </a:rPr>
-              <a:t>Traffic Management</a:t>
-            </a:r>
-          </a:p>
-          <a:p>
-            <a:pPr algn="l">
-              <a:spcAft>
-                <a:spcPts val="100"/>
-              </a:spcAft>
-            </a:pPr>
-            <a:r>
-              <a:rPr sz="1200" b="1" i="0">
-                <a:solidFill>
-                  <a:srgbClr val="3AEDE5"/>
-                </a:solidFill>
-                <a:latin typeface="Alegreya Sans"/>
-              </a:rPr>
-              <a:t>•  </a:t>
-            </a:r>
-            <a:r>
-              <a:rPr sz="1200" b="0" i="0">
-                <a:solidFill>
-                  <a:srgbClr val="FFFFFF"/>
-                </a:solidFill>
-                <a:latin typeface="Alegreya Sans"/>
-              </a:rPr>
-              <a:t>Paid Media (Meta, TikTok, Pinterest)</a:t>
-            </a:r>
-          </a:p>
-          <a:p>
-            <a:pPr algn="l">
-              <a:spcAft>
-                <a:spcPts val="100"/>
-              </a:spcAft>
-            </a:pPr>
-            <a:r>
-              <a:rPr sz="1200" b="1" i="0">
-                <a:solidFill>
-                  <a:srgbClr val="3AEDE5"/>
-                </a:solidFill>
-                <a:latin typeface="Alegreya Sans"/>
-              </a:rPr>
-              <a:t>•  </a:t>
-            </a:r>
-            <a:r>
-              <a:rPr sz="1200" b="0" i="0">
-                <a:solidFill>
-                  <a:srgbClr val="FFFFFF"/>
-                </a:solidFill>
-                <a:latin typeface="Alegreya Sans"/>
-              </a:rPr>
-              <a:t>E-commerce (Shopify)</a:t>
-            </a:r>
-          </a:p>
-          <a:p>
-            <a:pPr algn="l">
-              <a:spcAft>
-                <a:spcPts val="100"/>
-              </a:spcAft>
-            </a:pPr>
-            <a:r>
-              <a:rPr sz="1200" b="1" i="0">
-                <a:solidFill>
-                  <a:srgbClr val="3AEDE5"/>
-                </a:solidFill>
-                <a:latin typeface="Alegreya Sans"/>
-              </a:rPr>
-              <a:t>•  </a:t>
-            </a:r>
-            <a:r>
-              <a:rPr sz="1200" b="0" i="0">
-                <a:solidFill>
-                  <a:srgbClr val="FFFFFF"/>
-                </a:solidFill>
-                <a:latin typeface="Alegreya Sans"/>
-              </a:rPr>
-              <a:t>Analytics (GA, reporting KPI)</a:t>
-            </a:r>
-          </a:p>
-          <a:p>
-            <a:pPr algn="l">
-              <a:spcAft>
-                <a:spcPts val="100"/>
-              </a:spcAft>
-            </a:pPr>
-            <a:r>
-              <a:rPr sz="1200" b="1" i="0">
-                <a:solidFill>
-                  <a:srgbClr val="3AEDE5"/>
-                </a:solidFill>
-                <a:latin typeface="Alegreya Sans"/>
-              </a:rPr>
-              <a:t>•  </a:t>
-            </a:r>
-            <a:r>
-              <a:rPr sz="1200" b="0" i="0">
-                <a:solidFill>
-                  <a:srgbClr val="FFFFFF"/>
-                </a:solidFill>
-                <a:latin typeface="Alegreya Sans"/>
-              </a:rPr>
-              <a:t>Emailing (Mailjet)</a:t>
-            </a:r>
-          </a:p>
-          <a:p>
-            <a:pPr algn="l">
-              <a:spcBef>
-                <a:spcPts val="600"/>
-              </a:spcBef>
-              <a:spcAft>
-                <a:spcPts val="300"/>
-              </a:spcAft>
-            </a:pPr>
-            <a:r>
-              <a:rPr sz="1300" b="1" i="0">
-                <a:solidFill>
-                  <a:srgbClr val="3AEDE5"/>
-                </a:solidFill>
-                <a:latin typeface="Alegreya Sans"/>
-              </a:rPr>
-              <a:t>LANGUES</a:t>
-            </a:r>
-          </a:p>
-          <a:p>
-            <a:pPr algn="l">
-              <a:spcAft>
-                <a:spcPts val="100"/>
-              </a:spcAft>
-            </a:pPr>
-            <a:r>
-              <a:rPr sz="1200" b="1" i="0">
-                <a:solidFill>
-                  <a:srgbClr val="3AEDE5"/>
-                </a:solidFill>
-                <a:latin typeface="Alegreya Sans"/>
-              </a:rPr>
-              <a:t>•  </a:t>
-            </a:r>
-            <a:r>
-              <a:rPr sz="1200" b="0" i="0">
-                <a:solidFill>
-                  <a:srgbClr val="FFFFFF"/>
-                </a:solidFill>
-                <a:latin typeface="Alegreya Sans"/>
-              </a:rPr>
-              <a:t>Français — Langue maternelle</a:t>
-            </a:r>
-          </a:p>
-          <a:p>
-            <a:pPr algn="l">
-              <a:spcAft>
-                <a:spcPts val="100"/>
-              </a:spcAft>
-            </a:pPr>
-            <a:r>
-              <a:rPr sz="1200" b="1" i="0">
-                <a:solidFill>
-                  <a:srgbClr val="3AEDE5"/>
-                </a:solidFill>
-                <a:latin typeface="Alegreya Sans"/>
-              </a:rPr>
-              <a:t>•  </a:t>
-            </a:r>
-            <a:r>
-              <a:rPr sz="1200" b="0" i="0">
-                <a:solidFill>
-                  <a:srgbClr val="FFFFFF"/>
-                </a:solidFill>
-                <a:latin typeface="Alegreya Sans"/>
-              </a:rPr>
-              <a:t>Anglais — B2</a:t>
-            </a:r>
-          </a:p>
-          <a:p>
-            <a:pPr algn="l">
-              <a:spcBef>
-                <a:spcPts val="600"/>
-              </a:spcBef>
-              <a:spcAft>
-                <a:spcPts val="300"/>
-              </a:spcAft>
-            </a:pPr>
-            <a:r>
-              <a:rPr sz="1300" b="1" i="0">
-                <a:solidFill>
-                  <a:srgbClr val="3AEDE5"/>
-                </a:solidFill>
-                <a:latin typeface="Alegreya Sans"/>
-              </a:rPr>
-              <a:t>FORMATION &amp; CERTIFICATIONS</a:t>
-            </a:r>
-          </a:p>
-          <a:p>
-            <a:pPr algn="l">
-              <a:spcAft>
-                <a:spcPts val="100"/>
-              </a:spcAft>
-            </a:pPr>
-            <a:r>
-              <a:rPr sz="1200" b="1" i="0">
-                <a:solidFill>
-                  <a:srgbClr val="3AEDE5"/>
-                </a:solidFill>
-                <a:latin typeface="Alegreya Sans"/>
-              </a:rPr>
-              <a:t>2025 — 2027  </a:t>
-            </a:r>
-            <a:r>
-              <a:rPr sz="1200" b="1" i="0">
-                <a:solidFill>
-                  <a:srgbClr val="FFFFFF"/>
-                </a:solidFill>
-                <a:latin typeface="Alegreya Sans"/>
-              </a:rPr>
-              <a:t>EM Normandie Business School</a:t>
-            </a:r>
-          </a:p>
-          <a:p>
-            <a:pPr algn="l">
-              <a:spcAft>
-                <a:spcPts val="300"/>
-              </a:spcAft>
-            </a:pPr>
-            <a:r>
-              <a:rPr sz="1200" b="0" i="1">
-                <a:solidFill>
-                  <a:srgbClr val="CCD6E8"/>
-                </a:solidFill>
-                <a:latin typeface="Alegreya Sans"/>
-              </a:rPr>
-              <a:t>Master Programme Grande École, Marketing…</a:t>
-            </a:r>
-          </a:p>
-          <a:p>
-            <a:pPr algn="l">
-              <a:spcAft>
-                <a:spcPts val="100"/>
-              </a:spcAft>
-            </a:pPr>
-            <a:r>
-              <a:rPr sz="1200" b="1" i="0">
-                <a:solidFill>
-                  <a:srgbClr val="3AEDE5"/>
-                </a:solidFill>
-                <a:latin typeface="Alegreya Sans"/>
-              </a:rPr>
-              <a:t>2022 — 2025  </a:t>
-            </a:r>
-            <a:r>
-              <a:rPr sz="1200" b="1" i="0">
-                <a:solidFill>
-                  <a:srgbClr val="FFFFFF"/>
-                </a:solidFill>
-                <a:latin typeface="Alegreya Sans"/>
-              </a:rPr>
-              <a:t>EM Normandie</a:t>
-            </a:r>
-          </a:p>
-          <a:p>
-            <a:pPr algn="l">
-              <a:spcAft>
-                <a:spcPts val="300"/>
-              </a:spcAft>
-            </a:pPr>
-            <a:r>
-              <a:rPr sz="1200" b="0" i="1">
-                <a:solidFill>
-                  <a:srgbClr val="CCD6E8"/>
-                </a:solidFill>
-                <a:latin typeface="Alegreya Sans"/>
-              </a:rPr>
-              <a:t>Bachelor Management International, Marke…</a:t>
-            </a:r>
-          </a:p>
-          <a:p>
-            <a:pPr algn="l">
-              <a:spcAft>
-                <a:spcPts val="100"/>
-              </a:spcAft>
-            </a:pPr>
-            <a:r>
-              <a:rPr sz="1200" b="1" i="0">
-                <a:solidFill>
-                  <a:srgbClr val="3AEDE5"/>
-                </a:solidFill>
-                <a:latin typeface="Alegreya Sans"/>
-              </a:rPr>
-              <a:t>2024  </a:t>
-            </a:r>
-            <a:r>
-              <a:rPr sz="1200" b="1" i="0">
-                <a:solidFill>
-                  <a:srgbClr val="FFFFFF"/>
-                </a:solidFill>
-                <a:latin typeface="Alegreya Sans"/>
-              </a:rPr>
-              <a:t>HubSpot Academy</a:t>
-            </a:r>
-          </a:p>
-          <a:p>
-            <a:pPr algn="l">
-              <a:spcAft>
-                <a:spcPts val="300"/>
-              </a:spcAft>
-            </a:pPr>
-            <a:r>
-              <a:rPr sz="1200" b="0" i="1">
-                <a:solidFill>
-                  <a:srgbClr val="CCD6E8"/>
-                </a:solidFill>
-                <a:latin typeface="Alegreya Sans"/>
-              </a:rPr>
-              <a:t>Certification Inbound Marketing</a:t>
-            </a:r>
-          </a:p>
-          <a:p>
-            <a:pPr algn="l">
-              <a:spcAft>
-                <a:spcPts val="100"/>
-              </a:spcAft>
-            </a:pPr>
-            <a:r>
-              <a:rPr sz="1200" b="1" i="0">
-                <a:solidFill>
-                  <a:srgbClr val="3AEDE5"/>
-                </a:solidFill>
-                <a:latin typeface="Alegreya Sans"/>
-              </a:rPr>
-              <a:t>En cours  </a:t>
-            </a:r>
-            <a:r>
-              <a:rPr sz="1200" b="1" i="0">
-                <a:solidFill>
-                  <a:srgbClr val="FFFFFF"/>
-                </a:solidFill>
-                <a:latin typeface="Alegreya Sans"/>
-              </a:rPr>
-              <a:t>Pinterest</a:t>
-            </a:r>
-          </a:p>
-          <a:p>
-            <a:pPr algn="l">
-              <a:spcAft>
-                <a:spcPts val="300"/>
-              </a:spcAft>
-            </a:pPr>
-            <a:r>
-              <a:rPr sz="1200" b="0" i="1">
-                <a:solidFill>
-                  <a:srgbClr val="CCD6E8"/>
-                </a:solidFill>
-                <a:latin typeface="Alegreya Sans"/>
-              </a:rPr>
-              <a:t>Certification Pinterest Media Buyer</a:t>
-            </a:r>
-          </a:p>
-        </p:txBody>
-      </p:sp>
-      <p:sp>
-        <p:nvSpPr>
-          <p:cNvPr id="9" name="TextBox 8"/>
-          <p:cNvSpPr txBox="1"/>
-          <p:nvPr/>
-        </p:nvSpPr>
-        <p:spPr>
-          <a:xfrm>
-            <a:off x="4528600" y="1180000"/>
-            <a:ext cx="7434800" cy="5318000"/>
-          </a:xfrm>
-          <a:prstGeom prst="rect">
-            <a:avLst/>
-          </a:prstGeom>
-          <a:noFill/>
-        </p:spPr>
-        <p:txBody>
-          <a:bodyPr wrap="square" lIns="0" rIns="0" tIns="0" bIns="0">
-            <a:spAutoFit/>
-          </a:bodyPr>
-          <a:lstStyle/>
-          <a:p>
-            <a:pPr algn="l">
-              <a:spcAft>
-                <a:spcPts val="300"/>
-              </a:spcAft>
-            </a:pPr>
-            <a:r>
-              <a:rPr sz="1300" b="1" i="0">
-                <a:solidFill>
-                  <a:srgbClr val="3AEDE5"/>
-                </a:solidFill>
-                <a:latin typeface="Alegreya Sans"/>
-              </a:rPr>
-              <a:t>RÉSUMÉ</a:t>
-            </a:r>
-          </a:p>
-          <a:p>
-            <a:pPr algn="l">
-              <a:spcAft>
-                <a:spcPts val="300"/>
-              </a:spcAft>
-            </a:pPr>
-            <a:r>
-              <a:rPr sz="1200" b="0" i="0">
-                <a:solidFill>
-                  <a:srgbClr val="FFFFFF"/>
-                </a:solidFill>
-                <a:latin typeface="Alegreya Sans"/>
-              </a:rPr>
-              <a:t>Étudiante en Master 1 Programme Grande École (spécialisation innovation en marketing digital et IA) à l'EM Normandie Business School. Je recherche une alternance en traffic management, paid media et a…</a:t>
-            </a:r>
-          </a:p>
-          <a:p>
-            <a:pPr algn="l">
-              <a:spcBef>
-                <a:spcPts val="600"/>
-              </a:spcBef>
-              <a:spcAft>
-                <a:spcPts val="300"/>
-              </a:spcAft>
-            </a:pPr>
-            <a:r>
-              <a:rPr sz="1300" b="1" i="0">
-                <a:solidFill>
-                  <a:srgbClr val="3AEDE5"/>
-                </a:solidFill>
-                <a:latin typeface="Alegreya Sans"/>
-              </a:rPr>
-              <a:t>EXPÉRIENCE PROFESSIONNELLE</a:t>
-            </a:r>
-          </a:p>
-          <a:p>
-            <a:pPr algn="l">
-              <a:spcAft>
-                <a:spcPts val="100"/>
-              </a:spcAft>
-            </a:pPr>
-            <a:r>
-              <a:rPr sz="1200" b="1" i="0">
-                <a:solidFill>
-                  <a:srgbClr val="3AEDE5"/>
-                </a:solidFill>
-                <a:latin typeface="Alegreya Sans"/>
-              </a:rPr>
-              <a:t>▸ </a:t>
-            </a:r>
-            <a:r>
-              <a:rPr sz="1200" b="1" i="0">
-                <a:solidFill>
-                  <a:srgbClr val="FFFFFF"/>
-                </a:solidFill>
-                <a:latin typeface="Alegreya Sans"/>
-              </a:rPr>
-              <a:t>Hobbynote (agence média, Lille)</a:t>
-            </a:r>
-            <a:r>
-              <a:rPr sz="1200" b="0" i="0">
-                <a:solidFill>
-                  <a:srgbClr val="FFFFFF"/>
-                </a:solidFill>
-                <a:latin typeface="Alegreya Sans"/>
-              </a:rPr>
-              <a:t> — Stage puis alternance — Traffic Management</a:t>
-            </a:r>
-            <a:r>
-              <a:rPr sz="1200" b="0" i="1">
-                <a:solidFill>
-                  <a:srgbClr val="3AEDE5"/>
-                </a:solidFill>
-                <a:latin typeface="Alegreya Sans"/>
-              </a:rPr>
-              <a:t>  (2025 — en cours)</a:t>
-            </a:r>
-          </a:p>
-          <a:p>
-            <a:pPr algn="l" lvl="1">
-              <a:spcAft>
-                <a:spcPts val="100"/>
-              </a:spcAft>
-            </a:pPr>
-            <a:r>
-              <a:rPr sz="1200" b="1" i="0">
-                <a:solidFill>
-                  <a:srgbClr val="3AEDE5"/>
-                </a:solidFill>
-                <a:latin typeface="Alegreya Sans"/>
-              </a:rPr>
-              <a:t>•  </a:t>
-            </a:r>
-            <a:r>
-              <a:rPr sz="1200" b="0" i="0">
-                <a:solidFill>
-                  <a:srgbClr val="FFFFFF"/>
-                </a:solidFill>
-                <a:latin typeface="Alegreya Sans"/>
-              </a:rPr>
-              <a:t>Lancement et optimisation de campagnes Social Ads sur Meta Ads, TikTok Ads et Pinterest Ads ; mise en place des stratégies d'acquisition sel…</a:t>
-            </a:r>
-          </a:p>
-          <a:p>
-            <a:pPr algn="l" lvl="1">
-              <a:spcAft>
-                <a:spcPts val="100"/>
-              </a:spcAft>
-            </a:pPr>
-            <a:r>
-              <a:rPr sz="1200" b="1" i="0">
-                <a:solidFill>
-                  <a:srgbClr val="3AEDE5"/>
-                </a:solidFill>
-                <a:latin typeface="Alegreya Sans"/>
-              </a:rPr>
-              <a:t>•  </a:t>
-            </a:r>
-            <a:r>
-              <a:rPr sz="1200" b="0" i="0">
-                <a:solidFill>
-                  <a:srgbClr val="FFFFFF"/>
-                </a:solidFill>
-                <a:latin typeface="Alegreya Sans"/>
-              </a:rPr>
-              <a:t>Suivi et analyse des KPI ; bilans de campagnes ; veille concurrentielle &amp; benchmarks ; mise à jour du plan média.</a:t>
-            </a:r>
-          </a:p>
-          <a:p>
-            <a:pPr algn="l">
-              <a:spcAft>
-                <a:spcPts val="100"/>
-              </a:spcAft>
-            </a:pPr>
-            <a:r>
-              <a:rPr sz="1200" b="1" i="0">
-                <a:solidFill>
-                  <a:srgbClr val="3AEDE5"/>
-                </a:solidFill>
-                <a:latin typeface="Alegreya Sans"/>
-              </a:rPr>
-              <a:t>▸ </a:t>
-            </a:r>
-            <a:r>
-              <a:rPr sz="1200" b="1" i="0">
-                <a:solidFill>
-                  <a:srgbClr val="FFFFFF"/>
-                </a:solidFill>
-                <a:latin typeface="Alegreya Sans"/>
-              </a:rPr>
-              <a:t>Projet école</a:t>
-            </a:r>
-            <a:r>
-              <a:rPr sz="1200" b="0" i="0">
-                <a:solidFill>
-                  <a:srgbClr val="FFFFFF"/>
-                </a:solidFill>
-                <a:latin typeface="Alegreya Sans"/>
-              </a:rPr>
-              <a:t> — E-commerce</a:t>
-            </a:r>
-            <a:r>
-              <a:rPr sz="1200" b="0" i="1">
-                <a:solidFill>
-                  <a:srgbClr val="3AEDE5"/>
-                </a:solidFill>
-                <a:latin typeface="Alegreya Sans"/>
-              </a:rPr>
-              <a:t>  (2025)</a:t>
-            </a:r>
-          </a:p>
-          <a:p>
-            <a:pPr algn="l" lvl="1">
-              <a:spcAft>
-                <a:spcPts val="100"/>
-              </a:spcAft>
-            </a:pPr>
-            <a:r>
-              <a:rPr sz="1200" b="1" i="0">
-                <a:solidFill>
-                  <a:srgbClr val="3AEDE5"/>
-                </a:solidFill>
-                <a:latin typeface="Alegreya Sans"/>
-              </a:rPr>
-              <a:t>•  </a:t>
-            </a:r>
-            <a:r>
-              <a:rPr sz="1200" b="0" i="0">
-                <a:solidFill>
-                  <a:srgbClr val="FFFFFF"/>
-                </a:solidFill>
-                <a:latin typeface="Alegreya Sans"/>
-              </a:rPr>
-              <a:t>Création d'un site e-commerce sous Shopify ; optimisation ergonomique ; newsletter Mailjet ; stratégies de développement.</a:t>
-            </a:r>
-          </a:p>
-          <a:p>
-            <a:pPr algn="l">
-              <a:spcAft>
-                <a:spcPts val="100"/>
-              </a:spcAft>
-            </a:pPr>
-            <a:r>
-              <a:rPr sz="1200" b="1" i="0">
-                <a:solidFill>
-                  <a:srgbClr val="3AEDE5"/>
-                </a:solidFill>
-                <a:latin typeface="Alegreya Sans"/>
-              </a:rPr>
-              <a:t>▸ </a:t>
-            </a:r>
-            <a:r>
-              <a:rPr sz="1200" b="1" i="0">
-                <a:solidFill>
-                  <a:srgbClr val="FFFFFF"/>
-                </a:solidFill>
-                <a:latin typeface="Alegreya Sans"/>
-              </a:rPr>
-              <a:t>Projet personnel</a:t>
-            </a:r>
-            <a:r>
-              <a:rPr sz="1200" b="0" i="0">
-                <a:solidFill>
-                  <a:srgbClr val="FFFFFF"/>
-                </a:solidFill>
-                <a:latin typeface="Alegreya Sans"/>
-              </a:rPr>
-              <a:t> — E-commerce</a:t>
-            </a:r>
-            <a:r>
-              <a:rPr sz="1200" b="0" i="1">
-                <a:solidFill>
-                  <a:srgbClr val="3AEDE5"/>
-                </a:solidFill>
-                <a:latin typeface="Alegreya Sans"/>
-              </a:rPr>
-              <a:t>  (2024)</a:t>
-            </a:r>
-          </a:p>
-          <a:p>
-            <a:pPr algn="l" lvl="1">
-              <a:spcAft>
-                <a:spcPts val="100"/>
-              </a:spcAft>
-            </a:pPr>
-            <a:r>
-              <a:rPr sz="1200" b="1" i="0">
-                <a:solidFill>
-                  <a:srgbClr val="3AEDE5"/>
-                </a:solidFill>
-                <a:latin typeface="Alegreya Sans"/>
-              </a:rPr>
-              <a:t>•  </a:t>
-            </a:r>
-            <a:r>
-              <a:rPr sz="1200" b="0" i="0">
-                <a:solidFill>
-                  <a:srgbClr val="FFFFFF"/>
-                </a:solidFill>
-                <a:latin typeface="Alegreya Sans"/>
-              </a:rPr>
-              <a:t>Création et gestion d'un site e-commerce ; mise en ligne des produits ; publicités digitales ; suivi via Google Analytics.</a:t>
-            </a:r>
-          </a:p>
-          <a:p>
-            <a:pPr algn="l">
-              <a:spcAft>
-                <a:spcPts val="100"/>
-              </a:spcAft>
-            </a:pPr>
-            <a:r>
-              <a:rPr sz="1200" b="1" i="0">
-                <a:solidFill>
-                  <a:srgbClr val="3AEDE5"/>
-                </a:solidFill>
-                <a:latin typeface="Alegreya Sans"/>
-              </a:rPr>
-              <a:t>▸ </a:t>
-            </a:r>
-            <a:r>
-              <a:rPr sz="1200" b="1" i="0">
-                <a:solidFill>
-                  <a:srgbClr val="FFFFFF"/>
-                </a:solidFill>
-                <a:latin typeface="Alegreya Sans"/>
-              </a:rPr>
-              <a:t>OMB Tourisme (Le Havre)</a:t>
-            </a:r>
-            <a:r>
-              <a:rPr sz="1200" b="0" i="0">
-                <a:solidFill>
-                  <a:srgbClr val="FFFFFF"/>
-                </a:solidFill>
-                <a:latin typeface="Alegreya Sans"/>
-              </a:rPr>
-              <a:t> — Stage — Administration &amp; comptabilité</a:t>
-            </a:r>
-            <a:r>
-              <a:rPr sz="1200" b="0" i="1">
-                <a:solidFill>
-                  <a:srgbClr val="3AEDE5"/>
-                </a:solidFill>
-                <a:latin typeface="Alegreya Sans"/>
-              </a:rPr>
-              <a:t>  (2023)</a:t>
-            </a:r>
-          </a:p>
-        </p:txBody>
-      </p:sp>
       <p:sp>
         <p:nvSpPr>
           <p:cNvPr id="10" name="TextBox 9"/>
@@ -4166,61 +4155,6 @@
           <a:xfrm>
             <a:off x="0" y="0"/>
             <a:ext cx="12192000" cy="6858000"/>
-          </a:xfrm>
-          <a:prstGeom prst="rect">
-            <a:avLst/>
-          </a:prstGeom>
-          <a:ln>
-            <a:noFill/>
-          </a:ln>
-          <a:effectLst/>
-          <a:gradFill flip="none" rotWithShape="1">
-            <a:gsLst>
-              <a:gs pos="0">
-                <a:srgbClr val="07227A"/>
-              </a:gs>
-              <a:gs pos="85000">
-                <a:srgbClr val="07227A"/>
-              </a:gs>
-              <a:gs pos="100000">
-                <a:srgbClr val="1FCBD9"/>
-              </a:gs>
-            </a:gsLst>
-            <a:lin ang="2700000" scaled="0"/>
-          </a:gradFill>
-        </p:spPr>
-        <p:style>
-          <a:lnRef idx="1">
-            <a:schemeClr val="accent1"/>
-          </a:lnRef>
-          <a:fillRef idx="3">
-            <a:schemeClr val="accent1"/>
-          </a:fillRef>
-          <a:effectRef idx="2">
-            <a:schemeClr val="accent1"/>
-          </a:effectRef>
-          <a:fontRef idx="minor">
-            <a:schemeClr val="lt1"/>
-          </a:fontRef>
-        </p:style>
-        <p:txBody>
-          <a:bodyPr rtlCol="0" anchor="ctr"/>
-          <a:lstStyle/>
-          <a:p>
-            <a:pPr algn="ctr"/>
-          </a:p>
-        </p:txBody>
-      </p:sp>
-      <p:sp>
-        <p:nvSpPr>
-          <p:cNvPr id="3" name="Rectangle 2"/>
-          <p:cNvSpPr/>
-          <p:nvPr/>
-        </p:nvSpPr>
-        <p:spPr>
-          <a:xfrm>
-            <a:off x="0" y="0"/>
-            <a:ext cx="4300000" cy="6858000"/>
           </a:xfrm>
           <a:prstGeom prst="rect">
             <a:avLst/>
@@ -4257,7 +4191,922 @@
       </p:sp>
       <p:sp>
         <p:nvSpPr>
-          <p:cNvPr id="4" name="Rectangle 3"/>
+          <p:cNvPr id="3" name="Rectangle 2"/>
+          <p:cNvSpPr/>
+          <p:nvPr/>
+        </p:nvSpPr>
+        <p:spPr>
+          <a:xfrm>
+            <a:off x="4300000" y="0"/>
+            <a:ext cx="15000" cy="6858000"/>
+          </a:xfrm>
+          <a:prstGeom prst="rect">
+            <a:avLst/>
+          </a:prstGeom>
+          <a:solidFill>
+            <a:srgbClr val="3AEDE5"/>
+          </a:solidFill>
+          <a:ln>
+            <a:noFill/>
+          </a:ln>
+          <a:effectLst/>
+        </p:spPr>
+        <p:style>
+          <a:lnRef idx="1">
+            <a:schemeClr val="accent1"/>
+          </a:lnRef>
+          <a:fillRef idx="3">
+            <a:schemeClr val="accent1"/>
+          </a:fillRef>
+          <a:effectRef idx="2">
+            <a:schemeClr val="accent1"/>
+          </a:effectRef>
+          <a:fontRef idx="minor">
+            <a:schemeClr val="lt1"/>
+          </a:fontRef>
+        </p:style>
+        <p:txBody>
+          <a:bodyPr rtlCol="0" anchor="ctr"/>
+          <a:lstStyle/>
+          <a:p>
+            <a:pPr algn="ctr"/>
+          </a:p>
+        </p:txBody>
+      </p:sp>
+      <p:pic>
+        <p:nvPicPr>
+          <p:cNvPr id="4" name="Picture 3" descr="inside_circle_logo.png"/>
+          <p:cNvPicPr>
+            <a:picLocks noChangeAspect="1"/>
+          </p:cNvPicPr>
+          <p:nvPr/>
+        </p:nvPicPr>
+        <p:blipFill>
+          <a:blip r:embed="rId2"/>
+          <a:stretch>
+            <a:fillRect/>
+          </a:stretch>
+        </p:blipFill>
+        <p:spPr>
+          <a:xfrm>
+            <a:off x="10660000" y="130000"/>
+            <a:ext cx="1302000" cy="420000"/>
+          </a:xfrm>
+          <a:prstGeom prst="rect">
+            <a:avLst/>
+          </a:prstGeom>
+        </p:spPr>
+      </p:pic>
+      <p:sp>
+        <p:nvSpPr>
+          <p:cNvPr id="5" name="TextBox 4"/>
+          <p:cNvSpPr txBox="1"/>
+          <p:nvPr/>
+        </p:nvSpPr>
+        <p:spPr>
+          <a:xfrm>
+            <a:off x="228600" y="260000"/>
+            <a:ext cx="3842800" cy="800000"/>
+          </a:xfrm>
+          <a:prstGeom prst="rect">
+            <a:avLst/>
+          </a:prstGeom>
+          <a:noFill/>
+        </p:spPr>
+        <p:txBody>
+          <a:bodyPr wrap="square" lIns="0" rIns="0" tIns="0" bIns="0">
+            <a:spAutoFit/>
+          </a:bodyPr>
+          <a:lstStyle/>
+          <a:p>
+            <a:pPr algn="l"/>
+            <a:r>
+              <a:rPr sz="4800" b="1" i="0">
+                <a:solidFill>
+                  <a:srgbClr val="3AEDE5"/>
+                </a:solidFill>
+                <a:latin typeface="Alegreya Sans"/>
+              </a:rPr>
+              <a:t>I.D.</a:t>
+            </a:r>
+          </a:p>
+        </p:txBody>
+      </p:sp>
+      <p:sp>
+        <p:nvSpPr>
+          <p:cNvPr id="6" name="TextBox 5"/>
+          <p:cNvSpPr txBox="1"/>
+          <p:nvPr/>
+        </p:nvSpPr>
+        <p:spPr>
+          <a:xfrm>
+            <a:off x="4528600" y="300000"/>
+            <a:ext cx="5963400" cy="800000"/>
+          </a:xfrm>
+          <a:prstGeom prst="rect">
+            <a:avLst/>
+          </a:prstGeom>
+          <a:noFill/>
+        </p:spPr>
+        <p:txBody>
+          <a:bodyPr wrap="square" lIns="0" rIns="0" tIns="0" bIns="0">
+            <a:spAutoFit/>
+          </a:bodyPr>
+          <a:lstStyle/>
+          <a:p>
+            <a:r>
+              <a:rPr sz="2400" b="1" i="0">
+                <a:solidFill>
+                  <a:srgbClr val="FFFFFF"/>
+                </a:solidFill>
+                <a:latin typeface="Alegreya Sans"/>
+              </a:rPr>
+              <a:t>Traffic Manager — Paid Media (work-study)</a:t>
+            </a:r>
+          </a:p>
+          <a:p>
+            <a:pPr>
+              <a:spcBef>
+                <a:spcPts val="200"/>
+              </a:spcBef>
+            </a:pPr>
+            <a:r>
+              <a:rPr sz="1500" b="0" i="1">
+                <a:solidFill>
+                  <a:srgbClr val="3AEDE5"/>
+                </a:solidFill>
+                <a:latin typeface="Alegreya Sans"/>
+              </a:rPr>
+              <a:t>Digital Marketing — Acquisition &amp; Performance</a:t>
+            </a:r>
+          </a:p>
+        </p:txBody>
+      </p:sp>
+      <p:sp>
+        <p:nvSpPr>
+          <p:cNvPr id="7" name="TextBox 6"/>
+          <p:cNvSpPr txBox="1"/>
+          <p:nvPr/>
+        </p:nvSpPr>
+        <p:spPr>
+          <a:xfrm>
+            <a:off x="228600" y="1180000"/>
+            <a:ext cx="3842800" cy="5318000"/>
+          </a:xfrm>
+          <a:prstGeom prst="rect">
+            <a:avLst/>
+          </a:prstGeom>
+          <a:noFill/>
+        </p:spPr>
+        <p:txBody>
+          <a:bodyPr wrap="square" lIns="0" rIns="0" tIns="0" bIns="0">
+            <a:spAutoFit/>
+          </a:bodyPr>
+          <a:lstStyle/>
+          <a:p>
+            <a:pPr algn="l">
+              <a:spcAft>
+                <a:spcPts val="300"/>
+              </a:spcAft>
+            </a:pPr>
+            <a:r>
+              <a:rPr sz="1300" b="1" i="0">
+                <a:solidFill>
+                  <a:srgbClr val="3AEDE5"/>
+                </a:solidFill>
+                <a:latin typeface="Alegreya Sans"/>
+              </a:rPr>
+              <a:t>MAIN AREAS OF EXPERTISE</a:t>
+            </a:r>
+          </a:p>
+          <a:p>
+            <a:pPr algn="l">
+              <a:spcAft>
+                <a:spcPts val="100"/>
+              </a:spcAft>
+            </a:pPr>
+            <a:r>
+              <a:rPr sz="1200" b="1" i="0">
+                <a:solidFill>
+                  <a:srgbClr val="3AEDE5"/>
+                </a:solidFill>
+                <a:latin typeface="Alegreya Sans"/>
+              </a:rPr>
+              <a:t>•  </a:t>
+            </a:r>
+            <a:r>
+              <a:rPr sz="1200" b="0" i="0">
+                <a:solidFill>
+                  <a:srgbClr val="FFFFFF"/>
+                </a:solidFill>
+                <a:latin typeface="Alegreya Sans"/>
+              </a:rPr>
+              <a:t>Traffic Management</a:t>
+            </a:r>
+          </a:p>
+          <a:p>
+            <a:pPr algn="l">
+              <a:spcAft>
+                <a:spcPts val="100"/>
+              </a:spcAft>
+            </a:pPr>
+            <a:r>
+              <a:rPr sz="1200" b="1" i="0">
+                <a:solidFill>
+                  <a:srgbClr val="3AEDE5"/>
+                </a:solidFill>
+                <a:latin typeface="Alegreya Sans"/>
+              </a:rPr>
+              <a:t>•  </a:t>
+            </a:r>
+            <a:r>
+              <a:rPr sz="1200" b="0" i="0">
+                <a:solidFill>
+                  <a:srgbClr val="FFFFFF"/>
+                </a:solidFill>
+                <a:latin typeface="Alegreya Sans"/>
+              </a:rPr>
+              <a:t>Paid Media (Meta, TikTok, Pinterest)</a:t>
+            </a:r>
+          </a:p>
+          <a:p>
+            <a:pPr algn="l">
+              <a:spcAft>
+                <a:spcPts val="100"/>
+              </a:spcAft>
+            </a:pPr>
+            <a:r>
+              <a:rPr sz="1200" b="1" i="0">
+                <a:solidFill>
+                  <a:srgbClr val="3AEDE5"/>
+                </a:solidFill>
+                <a:latin typeface="Alegreya Sans"/>
+              </a:rPr>
+              <a:t>•  </a:t>
+            </a:r>
+            <a:r>
+              <a:rPr sz="1200" b="0" i="0">
+                <a:solidFill>
+                  <a:srgbClr val="FFFFFF"/>
+                </a:solidFill>
+                <a:latin typeface="Alegreya Sans"/>
+              </a:rPr>
+              <a:t>E-commerce (Shopify)</a:t>
+            </a:r>
+          </a:p>
+          <a:p>
+            <a:pPr algn="l">
+              <a:spcAft>
+                <a:spcPts val="100"/>
+              </a:spcAft>
+            </a:pPr>
+            <a:r>
+              <a:rPr sz="1200" b="1" i="0">
+                <a:solidFill>
+                  <a:srgbClr val="3AEDE5"/>
+                </a:solidFill>
+                <a:latin typeface="Alegreya Sans"/>
+              </a:rPr>
+              <a:t>•  </a:t>
+            </a:r>
+            <a:r>
+              <a:rPr sz="1200" b="0" i="0">
+                <a:solidFill>
+                  <a:srgbClr val="FFFFFF"/>
+                </a:solidFill>
+                <a:latin typeface="Alegreya Sans"/>
+              </a:rPr>
+              <a:t>Analytics (GA, KPI reporting)</a:t>
+            </a:r>
+          </a:p>
+          <a:p>
+            <a:pPr algn="l">
+              <a:spcAft>
+                <a:spcPts val="100"/>
+              </a:spcAft>
+            </a:pPr>
+            <a:r>
+              <a:rPr sz="1200" b="1" i="0">
+                <a:solidFill>
+                  <a:srgbClr val="3AEDE5"/>
+                </a:solidFill>
+                <a:latin typeface="Alegreya Sans"/>
+              </a:rPr>
+              <a:t>•  </a:t>
+            </a:r>
+            <a:r>
+              <a:rPr sz="1200" b="0" i="0">
+                <a:solidFill>
+                  <a:srgbClr val="FFFFFF"/>
+                </a:solidFill>
+                <a:latin typeface="Alegreya Sans"/>
+              </a:rPr>
+              <a:t>Emailing (Mailjet)</a:t>
+            </a:r>
+          </a:p>
+          <a:p>
+            <a:pPr algn="l">
+              <a:spcBef>
+                <a:spcPts val="600"/>
+              </a:spcBef>
+              <a:spcAft>
+                <a:spcPts val="300"/>
+              </a:spcAft>
+            </a:pPr>
+            <a:r>
+              <a:rPr sz="1300" b="1" i="0">
+                <a:solidFill>
+                  <a:srgbClr val="3AEDE5"/>
+                </a:solidFill>
+                <a:latin typeface="Alegreya Sans"/>
+              </a:rPr>
+              <a:t>LANGUAGES</a:t>
+            </a:r>
+          </a:p>
+          <a:p>
+            <a:pPr algn="l">
+              <a:spcAft>
+                <a:spcPts val="100"/>
+              </a:spcAft>
+            </a:pPr>
+            <a:r>
+              <a:rPr sz="1200" b="1" i="0">
+                <a:solidFill>
+                  <a:srgbClr val="3AEDE5"/>
+                </a:solidFill>
+                <a:latin typeface="Alegreya Sans"/>
+              </a:rPr>
+              <a:t>•  </a:t>
+            </a:r>
+            <a:r>
+              <a:rPr sz="1200" b="0" i="0">
+                <a:solidFill>
+                  <a:srgbClr val="FFFFFF"/>
+                </a:solidFill>
+                <a:latin typeface="Alegreya Sans"/>
+              </a:rPr>
+              <a:t>French — Native</a:t>
+            </a:r>
+          </a:p>
+          <a:p>
+            <a:pPr algn="l">
+              <a:spcAft>
+                <a:spcPts val="100"/>
+              </a:spcAft>
+            </a:pPr>
+            <a:r>
+              <a:rPr sz="1200" b="1" i="0">
+                <a:solidFill>
+                  <a:srgbClr val="3AEDE5"/>
+                </a:solidFill>
+                <a:latin typeface="Alegreya Sans"/>
+              </a:rPr>
+              <a:t>•  </a:t>
+            </a:r>
+            <a:r>
+              <a:rPr sz="1200" b="0" i="0">
+                <a:solidFill>
+                  <a:srgbClr val="FFFFFF"/>
+                </a:solidFill>
+                <a:latin typeface="Alegreya Sans"/>
+              </a:rPr>
+              <a:t>English — B2</a:t>
+            </a:r>
+          </a:p>
+          <a:p>
+            <a:pPr algn="l">
+              <a:spcBef>
+                <a:spcPts val="600"/>
+              </a:spcBef>
+              <a:spcAft>
+                <a:spcPts val="300"/>
+              </a:spcAft>
+            </a:pPr>
+            <a:r>
+              <a:rPr sz="1300" b="1" i="0">
+                <a:solidFill>
+                  <a:srgbClr val="3AEDE5"/>
+                </a:solidFill>
+                <a:latin typeface="Alegreya Sans"/>
+              </a:rPr>
+              <a:t>EDUCATION &amp; CERTIFICATIONS</a:t>
+            </a:r>
+          </a:p>
+          <a:p>
+            <a:pPr algn="l">
+              <a:spcAft>
+                <a:spcPts val="100"/>
+              </a:spcAft>
+            </a:pPr>
+            <a:r>
+              <a:rPr sz="1200" b="1" i="0">
+                <a:solidFill>
+                  <a:srgbClr val="3AEDE5"/>
+                </a:solidFill>
+                <a:latin typeface="Alegreya Sans"/>
+              </a:rPr>
+              <a:t>2025 — 2027  </a:t>
+            </a:r>
+            <a:r>
+              <a:rPr sz="1200" b="1" i="0">
+                <a:solidFill>
+                  <a:srgbClr val="FFFFFF"/>
+                </a:solidFill>
+                <a:latin typeface="Alegreya Sans"/>
+              </a:rPr>
+              <a:t>EM Normandie Business School</a:t>
+            </a:r>
+          </a:p>
+          <a:p>
+            <a:pPr algn="l">
+              <a:spcAft>
+                <a:spcPts val="300"/>
+              </a:spcAft>
+            </a:pPr>
+            <a:r>
+              <a:rPr sz="1200" b="0" i="1">
+                <a:solidFill>
+                  <a:srgbClr val="CCD6E8"/>
+                </a:solidFill>
+                <a:latin typeface="Alegreya Sans"/>
+              </a:rPr>
+              <a:t>Master's, Digital Marketing &amp; AI</a:t>
+            </a:r>
+          </a:p>
+          <a:p>
+            <a:pPr algn="l">
+              <a:spcAft>
+                <a:spcPts val="100"/>
+              </a:spcAft>
+            </a:pPr>
+            <a:r>
+              <a:rPr sz="1200" b="1" i="0">
+                <a:solidFill>
+                  <a:srgbClr val="3AEDE5"/>
+                </a:solidFill>
+                <a:latin typeface="Alegreya Sans"/>
+              </a:rPr>
+              <a:t>2022 — 2025  </a:t>
+            </a:r>
+            <a:r>
+              <a:rPr sz="1200" b="1" i="0">
+                <a:solidFill>
+                  <a:srgbClr val="FFFFFF"/>
+                </a:solidFill>
+                <a:latin typeface="Alegreya Sans"/>
+              </a:rPr>
+              <a:t>EM Normandie</a:t>
+            </a:r>
+          </a:p>
+          <a:p>
+            <a:pPr algn="l">
+              <a:spcAft>
+                <a:spcPts val="300"/>
+              </a:spcAft>
+            </a:pPr>
+            <a:r>
+              <a:rPr sz="1200" b="0" i="1">
+                <a:solidFill>
+                  <a:srgbClr val="CCD6E8"/>
+                </a:solidFill>
+                <a:latin typeface="Alegreya Sans"/>
+              </a:rPr>
+              <a:t>Bachelor International Management, Digit…</a:t>
+            </a:r>
+          </a:p>
+          <a:p>
+            <a:pPr algn="l">
+              <a:spcAft>
+                <a:spcPts val="100"/>
+              </a:spcAft>
+            </a:pPr>
+            <a:r>
+              <a:rPr sz="1200" b="1" i="0">
+                <a:solidFill>
+                  <a:srgbClr val="3AEDE5"/>
+                </a:solidFill>
+                <a:latin typeface="Alegreya Sans"/>
+              </a:rPr>
+              <a:t>2024  </a:t>
+            </a:r>
+            <a:r>
+              <a:rPr sz="1200" b="1" i="0">
+                <a:solidFill>
+                  <a:srgbClr val="FFFFFF"/>
+                </a:solidFill>
+                <a:latin typeface="Alegreya Sans"/>
+              </a:rPr>
+              <a:t>HubSpot Academy</a:t>
+            </a:r>
+          </a:p>
+          <a:p>
+            <a:pPr algn="l">
+              <a:spcAft>
+                <a:spcPts val="300"/>
+              </a:spcAft>
+            </a:pPr>
+            <a:r>
+              <a:rPr sz="1200" b="0" i="1">
+                <a:solidFill>
+                  <a:srgbClr val="CCD6E8"/>
+                </a:solidFill>
+                <a:latin typeface="Alegreya Sans"/>
+              </a:rPr>
+              <a:t>Inbound Marketing certification</a:t>
+            </a:r>
+          </a:p>
+          <a:p>
+            <a:pPr algn="l">
+              <a:spcAft>
+                <a:spcPts val="100"/>
+              </a:spcAft>
+            </a:pPr>
+            <a:r>
+              <a:rPr sz="1200" b="1" i="0">
+                <a:solidFill>
+                  <a:srgbClr val="3AEDE5"/>
+                </a:solidFill>
+                <a:latin typeface="Alegreya Sans"/>
+              </a:rPr>
+              <a:t>In progress  </a:t>
+            </a:r>
+            <a:r>
+              <a:rPr sz="1200" b="1" i="0">
+                <a:solidFill>
+                  <a:srgbClr val="FFFFFF"/>
+                </a:solidFill>
+                <a:latin typeface="Alegreya Sans"/>
+              </a:rPr>
+              <a:t>Pinterest</a:t>
+            </a:r>
+          </a:p>
+          <a:p>
+            <a:pPr algn="l">
+              <a:spcAft>
+                <a:spcPts val="300"/>
+              </a:spcAft>
+            </a:pPr>
+            <a:r>
+              <a:rPr sz="1200" b="0" i="1">
+                <a:solidFill>
+                  <a:srgbClr val="CCD6E8"/>
+                </a:solidFill>
+                <a:latin typeface="Alegreya Sans"/>
+              </a:rPr>
+              <a:t>Pinterest Media Buyer certification</a:t>
+            </a:r>
+          </a:p>
+        </p:txBody>
+      </p:sp>
+      <p:sp>
+        <p:nvSpPr>
+          <p:cNvPr id="8" name="TextBox 7"/>
+          <p:cNvSpPr txBox="1"/>
+          <p:nvPr/>
+        </p:nvSpPr>
+        <p:spPr>
+          <a:xfrm>
+            <a:off x="4528600" y="1180000"/>
+            <a:ext cx="7434800" cy="5318000"/>
+          </a:xfrm>
+          <a:prstGeom prst="rect">
+            <a:avLst/>
+          </a:prstGeom>
+          <a:noFill/>
+        </p:spPr>
+        <p:txBody>
+          <a:bodyPr wrap="square" lIns="0" rIns="0" tIns="0" bIns="0">
+            <a:spAutoFit/>
+          </a:bodyPr>
+          <a:lstStyle/>
+          <a:p>
+            <a:pPr algn="l">
+              <a:spcAft>
+                <a:spcPts val="300"/>
+              </a:spcAft>
+            </a:pPr>
+            <a:r>
+              <a:rPr sz="1300" b="1" i="0">
+                <a:solidFill>
+                  <a:srgbClr val="3AEDE5"/>
+                </a:solidFill>
+                <a:latin typeface="Alegreya Sans"/>
+              </a:rPr>
+              <a:t>SUMMARY</a:t>
+            </a:r>
+          </a:p>
+          <a:p>
+            <a:pPr algn="l">
+              <a:spcAft>
+                <a:spcPts val="300"/>
+              </a:spcAft>
+            </a:pPr>
+            <a:r>
+              <a:rPr sz="1200" b="0" i="0">
+                <a:solidFill>
+                  <a:srgbClr val="FFFFFF"/>
+                </a:solidFill>
+                <a:latin typeface="Alegreya Sans"/>
+              </a:rPr>
+              <a:t>Master 1 Grande École student (innovation in digital marketing and AI) at EM Normandie Business School. Looking for a work-study position in traffic management, paid media and acquisition. B2 English,…</a:t>
+            </a:r>
+          </a:p>
+          <a:p>
+            <a:pPr algn="l">
+              <a:spcBef>
+                <a:spcPts val="600"/>
+              </a:spcBef>
+              <a:spcAft>
+                <a:spcPts val="300"/>
+              </a:spcAft>
+            </a:pPr>
+            <a:r>
+              <a:rPr sz="1300" b="1" i="0">
+                <a:solidFill>
+                  <a:srgbClr val="3AEDE5"/>
+                </a:solidFill>
+                <a:latin typeface="Alegreya Sans"/>
+              </a:rPr>
+              <a:t>PROFESSIONAL EXPERIENCE</a:t>
+            </a:r>
+          </a:p>
+          <a:p>
+            <a:pPr algn="l">
+              <a:spcAft>
+                <a:spcPts val="100"/>
+              </a:spcAft>
+            </a:pPr>
+            <a:r>
+              <a:rPr sz="1200" b="1" i="0">
+                <a:solidFill>
+                  <a:srgbClr val="3AEDE5"/>
+                </a:solidFill>
+                <a:latin typeface="Alegreya Sans"/>
+              </a:rPr>
+              <a:t>▸ </a:t>
+            </a:r>
+            <a:r>
+              <a:rPr sz="1200" b="1" i="0">
+                <a:solidFill>
+                  <a:srgbClr val="FFFFFF"/>
+                </a:solidFill>
+                <a:latin typeface="Alegreya Sans"/>
+              </a:rPr>
+              <a:t>Hobbynote (media agency, Lille)</a:t>
+            </a:r>
+            <a:r>
+              <a:rPr sz="1200" b="0" i="0">
+                <a:solidFill>
+                  <a:srgbClr val="FFFFFF"/>
+                </a:solidFill>
+                <a:latin typeface="Alegreya Sans"/>
+              </a:rPr>
+              <a:t> — Intern then work-study — Traffic Management</a:t>
+            </a:r>
+            <a:r>
+              <a:rPr sz="1200" b="0" i="1">
+                <a:solidFill>
+                  <a:srgbClr val="3AEDE5"/>
+                </a:solidFill>
+                <a:latin typeface="Alegreya Sans"/>
+              </a:rPr>
+              <a:t>  (2025 — ongoing)</a:t>
+            </a:r>
+          </a:p>
+          <a:p>
+            <a:pPr algn="l" lvl="1">
+              <a:spcAft>
+                <a:spcPts val="100"/>
+              </a:spcAft>
+            </a:pPr>
+            <a:r>
+              <a:rPr sz="1200" b="1" i="0">
+                <a:solidFill>
+                  <a:srgbClr val="3AEDE5"/>
+                </a:solidFill>
+                <a:latin typeface="Alegreya Sans"/>
+              </a:rPr>
+              <a:t>•  </a:t>
+            </a:r>
+            <a:r>
+              <a:rPr sz="1200" b="0" i="0">
+                <a:solidFill>
+                  <a:srgbClr val="FFFFFF"/>
+                </a:solidFill>
+                <a:latin typeface="Alegreya Sans"/>
+              </a:rPr>
+              <a:t>Launch and optimisation of Social Ads campaigns on Meta Ads, TikTok Ads and Pinterest Ads; client acquisition strategies aligned to business…</a:t>
+            </a:r>
+          </a:p>
+          <a:p>
+            <a:pPr algn="l" lvl="1">
+              <a:spcAft>
+                <a:spcPts val="100"/>
+              </a:spcAft>
+            </a:pPr>
+            <a:r>
+              <a:rPr sz="1200" b="1" i="0">
+                <a:solidFill>
+                  <a:srgbClr val="3AEDE5"/>
+                </a:solidFill>
+                <a:latin typeface="Alegreya Sans"/>
+              </a:rPr>
+              <a:t>•  </a:t>
+            </a:r>
+            <a:r>
+              <a:rPr sz="1200" b="0" i="0">
+                <a:solidFill>
+                  <a:srgbClr val="FFFFFF"/>
+                </a:solidFill>
+                <a:latin typeface="Alegreya Sans"/>
+              </a:rPr>
+              <a:t>KPI tracking and analysis; campaign reviews; competitive watch &amp; benchmarks; media plan updates.</a:t>
+            </a:r>
+          </a:p>
+          <a:p>
+            <a:pPr algn="l">
+              <a:spcAft>
+                <a:spcPts val="100"/>
+              </a:spcAft>
+            </a:pPr>
+            <a:r>
+              <a:rPr sz="1200" b="1" i="0">
+                <a:solidFill>
+                  <a:srgbClr val="3AEDE5"/>
+                </a:solidFill>
+                <a:latin typeface="Alegreya Sans"/>
+              </a:rPr>
+              <a:t>▸ </a:t>
+            </a:r>
+            <a:r>
+              <a:rPr sz="1200" b="1" i="0">
+                <a:solidFill>
+                  <a:srgbClr val="FFFFFF"/>
+                </a:solidFill>
+                <a:latin typeface="Alegreya Sans"/>
+              </a:rPr>
+              <a:t>School project</a:t>
+            </a:r>
+            <a:r>
+              <a:rPr sz="1200" b="0" i="0">
+                <a:solidFill>
+                  <a:srgbClr val="FFFFFF"/>
+                </a:solidFill>
+                <a:latin typeface="Alegreya Sans"/>
+              </a:rPr>
+              <a:t> — E-commerce</a:t>
+            </a:r>
+            <a:r>
+              <a:rPr sz="1200" b="0" i="1">
+                <a:solidFill>
+                  <a:srgbClr val="3AEDE5"/>
+                </a:solidFill>
+                <a:latin typeface="Alegreya Sans"/>
+              </a:rPr>
+              <a:t>  (2025)</a:t>
+            </a:r>
+          </a:p>
+          <a:p>
+            <a:pPr algn="l" lvl="1">
+              <a:spcAft>
+                <a:spcPts val="100"/>
+              </a:spcAft>
+            </a:pPr>
+            <a:r>
+              <a:rPr sz="1200" b="1" i="0">
+                <a:solidFill>
+                  <a:srgbClr val="3AEDE5"/>
+                </a:solidFill>
+                <a:latin typeface="Alegreya Sans"/>
+              </a:rPr>
+              <a:t>•  </a:t>
+            </a:r>
+            <a:r>
+              <a:rPr sz="1200" b="0" i="0">
+                <a:solidFill>
+                  <a:srgbClr val="FFFFFF"/>
+                </a:solidFill>
+                <a:latin typeface="Alegreya Sans"/>
+              </a:rPr>
+              <a:t>Built a Shopify e-commerce site; UX optimisation; Mailjet newsletter; growth strategies.</a:t>
+            </a:r>
+          </a:p>
+          <a:p>
+            <a:pPr algn="l">
+              <a:spcAft>
+                <a:spcPts val="100"/>
+              </a:spcAft>
+            </a:pPr>
+            <a:r>
+              <a:rPr sz="1200" b="1" i="0">
+                <a:solidFill>
+                  <a:srgbClr val="3AEDE5"/>
+                </a:solidFill>
+                <a:latin typeface="Alegreya Sans"/>
+              </a:rPr>
+              <a:t>▸ </a:t>
+            </a:r>
+            <a:r>
+              <a:rPr sz="1200" b="1" i="0">
+                <a:solidFill>
+                  <a:srgbClr val="FFFFFF"/>
+                </a:solidFill>
+                <a:latin typeface="Alegreya Sans"/>
+              </a:rPr>
+              <a:t>Personal project</a:t>
+            </a:r>
+            <a:r>
+              <a:rPr sz="1200" b="0" i="0">
+                <a:solidFill>
+                  <a:srgbClr val="FFFFFF"/>
+                </a:solidFill>
+                <a:latin typeface="Alegreya Sans"/>
+              </a:rPr>
+              <a:t> — E-commerce</a:t>
+            </a:r>
+            <a:r>
+              <a:rPr sz="1200" b="0" i="1">
+                <a:solidFill>
+                  <a:srgbClr val="3AEDE5"/>
+                </a:solidFill>
+                <a:latin typeface="Alegreya Sans"/>
+              </a:rPr>
+              <a:t>  (2024)</a:t>
+            </a:r>
+          </a:p>
+          <a:p>
+            <a:pPr algn="l" lvl="1">
+              <a:spcAft>
+                <a:spcPts val="100"/>
+              </a:spcAft>
+            </a:pPr>
+            <a:r>
+              <a:rPr sz="1200" b="1" i="0">
+                <a:solidFill>
+                  <a:srgbClr val="3AEDE5"/>
+                </a:solidFill>
+                <a:latin typeface="Alegreya Sans"/>
+              </a:rPr>
+              <a:t>•  </a:t>
+            </a:r>
+            <a:r>
+              <a:rPr sz="1200" b="0" i="0">
+                <a:solidFill>
+                  <a:srgbClr val="FFFFFF"/>
+                </a:solidFill>
+                <a:latin typeface="Alegreya Sans"/>
+              </a:rPr>
+              <a:t>Created and ran an e-commerce site; product listings; digital ads; tracking via Google Analytics.</a:t>
+            </a:r>
+          </a:p>
+          <a:p>
+            <a:pPr algn="l">
+              <a:spcAft>
+                <a:spcPts val="100"/>
+              </a:spcAft>
+            </a:pPr>
+            <a:r>
+              <a:rPr sz="1200" b="1" i="0">
+                <a:solidFill>
+                  <a:srgbClr val="3AEDE5"/>
+                </a:solidFill>
+                <a:latin typeface="Alegreya Sans"/>
+              </a:rPr>
+              <a:t>▸ </a:t>
+            </a:r>
+            <a:r>
+              <a:rPr sz="1200" b="1" i="0">
+                <a:solidFill>
+                  <a:srgbClr val="FFFFFF"/>
+                </a:solidFill>
+                <a:latin typeface="Alegreya Sans"/>
+              </a:rPr>
+              <a:t>OMB Tourisme (Le Havre)</a:t>
+            </a:r>
+            <a:r>
+              <a:rPr sz="1200" b="0" i="0">
+                <a:solidFill>
+                  <a:srgbClr val="FFFFFF"/>
+                </a:solidFill>
+                <a:latin typeface="Alegreya Sans"/>
+              </a:rPr>
+              <a:t> — Intern — Administration &amp; Accounting</a:t>
+            </a:r>
+            <a:r>
+              <a:rPr sz="1200" b="0" i="1">
+                <a:solidFill>
+                  <a:srgbClr val="3AEDE5"/>
+                </a:solidFill>
+                <a:latin typeface="Alegreya Sans"/>
+              </a:rPr>
+              <a:t>  (2023)</a:t>
+            </a:r>
+          </a:p>
+        </p:txBody>
+      </p:sp>
+      <p:sp>
+        <p:nvSpPr>
+          <p:cNvPr id="9" name="Rectangle 8"/>
           <p:cNvSpPr/>
           <p:nvPr/>
         </p:nvSpPr>
@@ -4296,877 +5145,6 @@
           <a:lstStyle/>
           <a:p>
             <a:pPr algn="ctr"/>
-          </a:p>
-        </p:txBody>
-      </p:sp>
-      <p:pic>
-        <p:nvPicPr>
-          <p:cNvPr id="5" name="Picture 4" descr="inside_circle_logo.png"/>
-          <p:cNvPicPr>
-            <a:picLocks noChangeAspect="1"/>
-          </p:cNvPicPr>
-          <p:nvPr/>
-        </p:nvPicPr>
-        <p:blipFill>
-          <a:blip r:embed="rId2"/>
-          <a:stretch>
-            <a:fillRect/>
-          </a:stretch>
-        </p:blipFill>
-        <p:spPr>
-          <a:xfrm>
-            <a:off x="10660000" y="130000"/>
-            <a:ext cx="1302000" cy="420000"/>
-          </a:xfrm>
-          <a:prstGeom prst="rect">
-            <a:avLst/>
-          </a:prstGeom>
-        </p:spPr>
-      </p:pic>
-      <p:sp>
-        <p:nvSpPr>
-          <p:cNvPr id="6" name="TextBox 5"/>
-          <p:cNvSpPr txBox="1"/>
-          <p:nvPr/>
-        </p:nvSpPr>
-        <p:spPr>
-          <a:xfrm>
-            <a:off x="228600" y="260000"/>
-            <a:ext cx="3842800" cy="800000"/>
-          </a:xfrm>
-          <a:prstGeom prst="rect">
-            <a:avLst/>
-          </a:prstGeom>
-          <a:noFill/>
-        </p:spPr>
-        <p:txBody>
-          <a:bodyPr wrap="square" lIns="0" rIns="0" tIns="0" bIns="0">
-            <a:spAutoFit/>
-          </a:bodyPr>
-          <a:lstStyle/>
-          <a:p>
-            <a:pPr algn="l"/>
-            <a:r>
-              <a:rPr sz="4800" b="1" i="0">
-                <a:solidFill>
-                  <a:srgbClr val="3AEDE5"/>
-                </a:solidFill>
-                <a:latin typeface="Alegreya Sans"/>
-              </a:rPr>
-              <a:t>I.D.</a:t>
-            </a:r>
-          </a:p>
-        </p:txBody>
-      </p:sp>
-      <p:sp>
-        <p:nvSpPr>
-          <p:cNvPr id="7" name="TextBox 6"/>
-          <p:cNvSpPr txBox="1"/>
-          <p:nvPr/>
-        </p:nvSpPr>
-        <p:spPr>
-          <a:xfrm>
-            <a:off x="4528600" y="300000"/>
-            <a:ext cx="5963400" cy="800000"/>
-          </a:xfrm>
-          <a:prstGeom prst="rect">
-            <a:avLst/>
-          </a:prstGeom>
-          <a:noFill/>
-        </p:spPr>
-        <p:txBody>
-          <a:bodyPr wrap="square" lIns="0" rIns="0" tIns="0" bIns="0">
-            <a:spAutoFit/>
-          </a:bodyPr>
-          <a:lstStyle/>
-          <a:p>
-            <a:r>
-              <a:rPr sz="2400" b="1" i="0">
-                <a:solidFill>
-                  <a:srgbClr val="FFFFFF"/>
-                </a:solidFill>
-                <a:latin typeface="Alegreya Sans"/>
-              </a:rPr>
-              <a:t>Traffic Manager — Paid Media (work-study)</a:t>
-            </a:r>
-          </a:p>
-          <a:p>
-            <a:pPr>
-              <a:spcBef>
-                <a:spcPts val="200"/>
-              </a:spcBef>
-            </a:pPr>
-            <a:r>
-              <a:rPr sz="1500" b="0" i="1">
-                <a:solidFill>
-                  <a:srgbClr val="3AEDE5"/>
-                </a:solidFill>
-                <a:latin typeface="Alegreya Sans"/>
-              </a:rPr>
-              <a:t>Digital Marketing — Acquisition &amp; Performance</a:t>
-            </a:r>
-          </a:p>
-        </p:txBody>
-      </p:sp>
-      <p:sp>
-        <p:nvSpPr>
-          <p:cNvPr id="8" name="TextBox 7"/>
-          <p:cNvSpPr txBox="1"/>
-          <p:nvPr/>
-        </p:nvSpPr>
-        <p:spPr>
-          <a:xfrm>
-            <a:off x="228600" y="1180000"/>
-            <a:ext cx="3842800" cy="5318000"/>
-          </a:xfrm>
-          <a:prstGeom prst="rect">
-            <a:avLst/>
-          </a:prstGeom>
-          <a:noFill/>
-        </p:spPr>
-        <p:txBody>
-          <a:bodyPr wrap="square" lIns="0" rIns="0" tIns="0" bIns="0">
-            <a:spAutoFit/>
-          </a:bodyPr>
-          <a:lstStyle/>
-          <a:p>
-            <a:pPr algn="l">
-              <a:spcAft>
-                <a:spcPts val="300"/>
-              </a:spcAft>
-            </a:pPr>
-            <a:r>
-              <a:rPr sz="1300" b="1" i="0">
-                <a:solidFill>
-                  <a:srgbClr val="3AEDE5"/>
-                </a:solidFill>
-                <a:latin typeface="Alegreya Sans"/>
-              </a:rPr>
-              <a:t>MAIN AREAS OF EXPERTISE</a:t>
-            </a:r>
-          </a:p>
-          <a:p>
-            <a:pPr algn="l">
-              <a:spcAft>
-                <a:spcPts val="100"/>
-              </a:spcAft>
-            </a:pPr>
-            <a:r>
-              <a:rPr sz="1200" b="1" i="0">
-                <a:solidFill>
-                  <a:srgbClr val="3AEDE5"/>
-                </a:solidFill>
-                <a:latin typeface="Alegreya Sans"/>
-              </a:rPr>
-              <a:t>•  </a:t>
-            </a:r>
-            <a:r>
-              <a:rPr sz="1200" b="0" i="0">
-                <a:solidFill>
-                  <a:srgbClr val="FFFFFF"/>
-                </a:solidFill>
-                <a:latin typeface="Alegreya Sans"/>
-              </a:rPr>
-              <a:t>Traffic Management</a:t>
-            </a:r>
-          </a:p>
-          <a:p>
-            <a:pPr algn="l">
-              <a:spcAft>
-                <a:spcPts val="100"/>
-              </a:spcAft>
-            </a:pPr>
-            <a:r>
-              <a:rPr sz="1200" b="1" i="0">
-                <a:solidFill>
-                  <a:srgbClr val="3AEDE5"/>
-                </a:solidFill>
-                <a:latin typeface="Alegreya Sans"/>
-              </a:rPr>
-              <a:t>•  </a:t>
-            </a:r>
-            <a:r>
-              <a:rPr sz="1200" b="0" i="0">
-                <a:solidFill>
-                  <a:srgbClr val="FFFFFF"/>
-                </a:solidFill>
-                <a:latin typeface="Alegreya Sans"/>
-              </a:rPr>
-              <a:t>Paid Media (Meta, TikTok, Pinterest)</a:t>
-            </a:r>
-          </a:p>
-          <a:p>
-            <a:pPr algn="l">
-              <a:spcAft>
-                <a:spcPts val="100"/>
-              </a:spcAft>
-            </a:pPr>
-            <a:r>
-              <a:rPr sz="1200" b="1" i="0">
-                <a:solidFill>
-                  <a:srgbClr val="3AEDE5"/>
-                </a:solidFill>
-                <a:latin typeface="Alegreya Sans"/>
-              </a:rPr>
-              <a:t>•  </a:t>
-            </a:r>
-            <a:r>
-              <a:rPr sz="1200" b="0" i="0">
-                <a:solidFill>
-                  <a:srgbClr val="FFFFFF"/>
-                </a:solidFill>
-                <a:latin typeface="Alegreya Sans"/>
-              </a:rPr>
-              <a:t>E-commerce (Shopify)</a:t>
-            </a:r>
-          </a:p>
-          <a:p>
-            <a:pPr algn="l">
-              <a:spcAft>
-                <a:spcPts val="100"/>
-              </a:spcAft>
-            </a:pPr>
-            <a:r>
-              <a:rPr sz="1200" b="1" i="0">
-                <a:solidFill>
-                  <a:srgbClr val="3AEDE5"/>
-                </a:solidFill>
-                <a:latin typeface="Alegreya Sans"/>
-              </a:rPr>
-              <a:t>•  </a:t>
-            </a:r>
-            <a:r>
-              <a:rPr sz="1200" b="0" i="0">
-                <a:solidFill>
-                  <a:srgbClr val="FFFFFF"/>
-                </a:solidFill>
-                <a:latin typeface="Alegreya Sans"/>
-              </a:rPr>
-              <a:t>Analytics (GA, KPI reporting)</a:t>
-            </a:r>
-          </a:p>
-          <a:p>
-            <a:pPr algn="l">
-              <a:spcAft>
-                <a:spcPts val="100"/>
-              </a:spcAft>
-            </a:pPr>
-            <a:r>
-              <a:rPr sz="1200" b="1" i="0">
-                <a:solidFill>
-                  <a:srgbClr val="3AEDE5"/>
-                </a:solidFill>
-                <a:latin typeface="Alegreya Sans"/>
-              </a:rPr>
-              <a:t>•  </a:t>
-            </a:r>
-            <a:r>
-              <a:rPr sz="1200" b="0" i="0">
-                <a:solidFill>
-                  <a:srgbClr val="FFFFFF"/>
-                </a:solidFill>
-                <a:latin typeface="Alegreya Sans"/>
-              </a:rPr>
-              <a:t>Emailing (Mailjet)</a:t>
-            </a:r>
-          </a:p>
-          <a:p>
-            <a:pPr algn="l">
-              <a:spcBef>
-                <a:spcPts val="600"/>
-              </a:spcBef>
-              <a:spcAft>
-                <a:spcPts val="300"/>
-              </a:spcAft>
-            </a:pPr>
-            <a:r>
-              <a:rPr sz="1300" b="1" i="0">
-                <a:solidFill>
-                  <a:srgbClr val="3AEDE5"/>
-                </a:solidFill>
-                <a:latin typeface="Alegreya Sans"/>
-              </a:rPr>
-              <a:t>LANGUAGES</a:t>
-            </a:r>
-          </a:p>
-          <a:p>
-            <a:pPr algn="l">
-              <a:spcAft>
-                <a:spcPts val="100"/>
-              </a:spcAft>
-            </a:pPr>
-            <a:r>
-              <a:rPr sz="1200" b="1" i="0">
-                <a:solidFill>
-                  <a:srgbClr val="3AEDE5"/>
-                </a:solidFill>
-                <a:latin typeface="Alegreya Sans"/>
-              </a:rPr>
-              <a:t>•  </a:t>
-            </a:r>
-            <a:r>
-              <a:rPr sz="1200" b="0" i="0">
-                <a:solidFill>
-                  <a:srgbClr val="FFFFFF"/>
-                </a:solidFill>
-                <a:latin typeface="Alegreya Sans"/>
-              </a:rPr>
-              <a:t>French — Native</a:t>
-            </a:r>
-          </a:p>
-          <a:p>
-            <a:pPr algn="l">
-              <a:spcAft>
-                <a:spcPts val="100"/>
-              </a:spcAft>
-            </a:pPr>
-            <a:r>
-              <a:rPr sz="1200" b="1" i="0">
-                <a:solidFill>
-                  <a:srgbClr val="3AEDE5"/>
-                </a:solidFill>
-                <a:latin typeface="Alegreya Sans"/>
-              </a:rPr>
-              <a:t>•  </a:t>
-            </a:r>
-            <a:r>
-              <a:rPr sz="1200" b="0" i="0">
-                <a:solidFill>
-                  <a:srgbClr val="FFFFFF"/>
-                </a:solidFill>
-                <a:latin typeface="Alegreya Sans"/>
-              </a:rPr>
-              <a:t>English — B2</a:t>
-            </a:r>
-          </a:p>
-          <a:p>
-            <a:pPr algn="l">
-              <a:spcBef>
-                <a:spcPts val="600"/>
-              </a:spcBef>
-              <a:spcAft>
-                <a:spcPts val="300"/>
-              </a:spcAft>
-            </a:pPr>
-            <a:r>
-              <a:rPr sz="1300" b="1" i="0">
-                <a:solidFill>
-                  <a:srgbClr val="3AEDE5"/>
-                </a:solidFill>
-                <a:latin typeface="Alegreya Sans"/>
-              </a:rPr>
-              <a:t>EDUCATION &amp; CERTIFICATIONS</a:t>
-            </a:r>
-          </a:p>
-          <a:p>
-            <a:pPr algn="l">
-              <a:spcAft>
-                <a:spcPts val="100"/>
-              </a:spcAft>
-            </a:pPr>
-            <a:r>
-              <a:rPr sz="1200" b="1" i="0">
-                <a:solidFill>
-                  <a:srgbClr val="3AEDE5"/>
-                </a:solidFill>
-                <a:latin typeface="Alegreya Sans"/>
-              </a:rPr>
-              <a:t>2025 — 2027  </a:t>
-            </a:r>
-            <a:r>
-              <a:rPr sz="1200" b="1" i="0">
-                <a:solidFill>
-                  <a:srgbClr val="FFFFFF"/>
-                </a:solidFill>
-                <a:latin typeface="Alegreya Sans"/>
-              </a:rPr>
-              <a:t>EM Normandie Business School</a:t>
-            </a:r>
-          </a:p>
-          <a:p>
-            <a:pPr algn="l">
-              <a:spcAft>
-                <a:spcPts val="300"/>
-              </a:spcAft>
-            </a:pPr>
-            <a:r>
-              <a:rPr sz="1200" b="0" i="1">
-                <a:solidFill>
-                  <a:srgbClr val="CCD6E8"/>
-                </a:solidFill>
-                <a:latin typeface="Alegreya Sans"/>
-              </a:rPr>
-              <a:t>Master's, Digital Marketing &amp; AI</a:t>
-            </a:r>
-          </a:p>
-          <a:p>
-            <a:pPr algn="l">
-              <a:spcAft>
-                <a:spcPts val="100"/>
-              </a:spcAft>
-            </a:pPr>
-            <a:r>
-              <a:rPr sz="1200" b="1" i="0">
-                <a:solidFill>
-                  <a:srgbClr val="3AEDE5"/>
-                </a:solidFill>
-                <a:latin typeface="Alegreya Sans"/>
-              </a:rPr>
-              <a:t>2022 — 2025  </a:t>
-            </a:r>
-            <a:r>
-              <a:rPr sz="1200" b="1" i="0">
-                <a:solidFill>
-                  <a:srgbClr val="FFFFFF"/>
-                </a:solidFill>
-                <a:latin typeface="Alegreya Sans"/>
-              </a:rPr>
-              <a:t>EM Normandie</a:t>
-            </a:r>
-          </a:p>
-          <a:p>
-            <a:pPr algn="l">
-              <a:spcAft>
-                <a:spcPts val="300"/>
-              </a:spcAft>
-            </a:pPr>
-            <a:r>
-              <a:rPr sz="1200" b="0" i="1">
-                <a:solidFill>
-                  <a:srgbClr val="CCD6E8"/>
-                </a:solidFill>
-                <a:latin typeface="Alegreya Sans"/>
-              </a:rPr>
-              <a:t>Bachelor International Management, Digit…</a:t>
-            </a:r>
-          </a:p>
-          <a:p>
-            <a:pPr algn="l">
-              <a:spcAft>
-                <a:spcPts val="100"/>
-              </a:spcAft>
-            </a:pPr>
-            <a:r>
-              <a:rPr sz="1200" b="1" i="0">
-                <a:solidFill>
-                  <a:srgbClr val="3AEDE5"/>
-                </a:solidFill>
-                <a:latin typeface="Alegreya Sans"/>
-              </a:rPr>
-              <a:t>2024  </a:t>
-            </a:r>
-            <a:r>
-              <a:rPr sz="1200" b="1" i="0">
-                <a:solidFill>
-                  <a:srgbClr val="FFFFFF"/>
-                </a:solidFill>
-                <a:latin typeface="Alegreya Sans"/>
-              </a:rPr>
-              <a:t>HubSpot Academy</a:t>
-            </a:r>
-          </a:p>
-          <a:p>
-            <a:pPr algn="l">
-              <a:spcAft>
-                <a:spcPts val="300"/>
-              </a:spcAft>
-            </a:pPr>
-            <a:r>
-              <a:rPr sz="1200" b="0" i="1">
-                <a:solidFill>
-                  <a:srgbClr val="CCD6E8"/>
-                </a:solidFill>
-                <a:latin typeface="Alegreya Sans"/>
-              </a:rPr>
-              <a:t>Inbound Marketing certification</a:t>
-            </a:r>
-          </a:p>
-          <a:p>
-            <a:pPr algn="l">
-              <a:spcAft>
-                <a:spcPts val="100"/>
-              </a:spcAft>
-            </a:pPr>
-            <a:r>
-              <a:rPr sz="1200" b="1" i="0">
-                <a:solidFill>
-                  <a:srgbClr val="3AEDE5"/>
-                </a:solidFill>
-                <a:latin typeface="Alegreya Sans"/>
-              </a:rPr>
-              <a:t>In progress  </a:t>
-            </a:r>
-            <a:r>
-              <a:rPr sz="1200" b="1" i="0">
-                <a:solidFill>
-                  <a:srgbClr val="FFFFFF"/>
-                </a:solidFill>
-                <a:latin typeface="Alegreya Sans"/>
-              </a:rPr>
-              <a:t>Pinterest</a:t>
-            </a:r>
-          </a:p>
-          <a:p>
-            <a:pPr algn="l">
-              <a:spcAft>
-                <a:spcPts val="300"/>
-              </a:spcAft>
-            </a:pPr>
-            <a:r>
-              <a:rPr sz="1200" b="0" i="1">
-                <a:solidFill>
-                  <a:srgbClr val="CCD6E8"/>
-                </a:solidFill>
-                <a:latin typeface="Alegreya Sans"/>
-              </a:rPr>
-              <a:t>Pinterest Media Buyer certification</a:t>
-            </a:r>
-          </a:p>
-        </p:txBody>
-      </p:sp>
-      <p:sp>
-        <p:nvSpPr>
-          <p:cNvPr id="9" name="TextBox 8"/>
-          <p:cNvSpPr txBox="1"/>
-          <p:nvPr/>
-        </p:nvSpPr>
-        <p:spPr>
-          <a:xfrm>
-            <a:off x="4528600" y="1180000"/>
-            <a:ext cx="7434800" cy="5318000"/>
-          </a:xfrm>
-          <a:prstGeom prst="rect">
-            <a:avLst/>
-          </a:prstGeom>
-          <a:noFill/>
-        </p:spPr>
-        <p:txBody>
-          <a:bodyPr wrap="square" lIns="0" rIns="0" tIns="0" bIns="0">
-            <a:spAutoFit/>
-          </a:bodyPr>
-          <a:lstStyle/>
-          <a:p>
-            <a:pPr algn="l">
-              <a:spcAft>
-                <a:spcPts val="300"/>
-              </a:spcAft>
-            </a:pPr>
-            <a:r>
-              <a:rPr sz="1300" b="1" i="0">
-                <a:solidFill>
-                  <a:srgbClr val="3AEDE5"/>
-                </a:solidFill>
-                <a:latin typeface="Alegreya Sans"/>
-              </a:rPr>
-              <a:t>SUMMARY</a:t>
-            </a:r>
-          </a:p>
-          <a:p>
-            <a:pPr algn="l">
-              <a:spcAft>
-                <a:spcPts val="300"/>
-              </a:spcAft>
-            </a:pPr>
-            <a:r>
-              <a:rPr sz="1200" b="0" i="0">
-                <a:solidFill>
-                  <a:srgbClr val="FFFFFF"/>
-                </a:solidFill>
-                <a:latin typeface="Alegreya Sans"/>
-              </a:rPr>
-              <a:t>Master 1 Grande École student (innovation in digital marketing and AI) at EM Normandie Business School. Looking for a work-study position in traffic management, paid media and acquisition. B2 English,…</a:t>
-            </a:r>
-          </a:p>
-          <a:p>
-            <a:pPr algn="l">
-              <a:spcBef>
-                <a:spcPts val="600"/>
-              </a:spcBef>
-              <a:spcAft>
-                <a:spcPts val="300"/>
-              </a:spcAft>
-            </a:pPr>
-            <a:r>
-              <a:rPr sz="1300" b="1" i="0">
-                <a:solidFill>
-                  <a:srgbClr val="3AEDE5"/>
-                </a:solidFill>
-                <a:latin typeface="Alegreya Sans"/>
-              </a:rPr>
-              <a:t>PROFESSIONAL EXPERIENCE</a:t>
-            </a:r>
-          </a:p>
-          <a:p>
-            <a:pPr algn="l">
-              <a:spcAft>
-                <a:spcPts val="100"/>
-              </a:spcAft>
-            </a:pPr>
-            <a:r>
-              <a:rPr sz="1200" b="1" i="0">
-                <a:solidFill>
-                  <a:srgbClr val="3AEDE5"/>
-                </a:solidFill>
-                <a:latin typeface="Alegreya Sans"/>
-              </a:rPr>
-              <a:t>▸ </a:t>
-            </a:r>
-            <a:r>
-              <a:rPr sz="1200" b="1" i="0">
-                <a:solidFill>
-                  <a:srgbClr val="FFFFFF"/>
-                </a:solidFill>
-                <a:latin typeface="Alegreya Sans"/>
-              </a:rPr>
-              <a:t>Hobbynote (media agency, Lille)</a:t>
-            </a:r>
-            <a:r>
-              <a:rPr sz="1200" b="0" i="0">
-                <a:solidFill>
-                  <a:srgbClr val="FFFFFF"/>
-                </a:solidFill>
-                <a:latin typeface="Alegreya Sans"/>
-              </a:rPr>
-              <a:t> — Intern then work-study — Traffic Management</a:t>
-            </a:r>
-            <a:r>
-              <a:rPr sz="1200" b="0" i="1">
-                <a:solidFill>
-                  <a:srgbClr val="3AEDE5"/>
-                </a:solidFill>
-                <a:latin typeface="Alegreya Sans"/>
-              </a:rPr>
-              <a:t>  (2025 — ongoing)</a:t>
-            </a:r>
-          </a:p>
-          <a:p>
-            <a:pPr algn="l" lvl="1">
-              <a:spcAft>
-                <a:spcPts val="100"/>
-              </a:spcAft>
-            </a:pPr>
-            <a:r>
-              <a:rPr sz="1200" b="1" i="0">
-                <a:solidFill>
-                  <a:srgbClr val="3AEDE5"/>
-                </a:solidFill>
-                <a:latin typeface="Alegreya Sans"/>
-              </a:rPr>
-              <a:t>•  </a:t>
-            </a:r>
-            <a:r>
-              <a:rPr sz="1200" b="0" i="0">
-                <a:solidFill>
-                  <a:srgbClr val="FFFFFF"/>
-                </a:solidFill>
-                <a:latin typeface="Alegreya Sans"/>
-              </a:rPr>
-              <a:t>Launch and optimisation of Social Ads campaigns on Meta Ads, TikTok Ads and Pinterest Ads; client acquisition strategies aligned to business…</a:t>
-            </a:r>
-          </a:p>
-          <a:p>
-            <a:pPr algn="l" lvl="1">
-              <a:spcAft>
-                <a:spcPts val="100"/>
-              </a:spcAft>
-            </a:pPr>
-            <a:r>
-              <a:rPr sz="1200" b="1" i="0">
-                <a:solidFill>
-                  <a:srgbClr val="3AEDE5"/>
-                </a:solidFill>
-                <a:latin typeface="Alegreya Sans"/>
-              </a:rPr>
-              <a:t>•  </a:t>
-            </a:r>
-            <a:r>
-              <a:rPr sz="1200" b="0" i="0">
-                <a:solidFill>
-                  <a:srgbClr val="FFFFFF"/>
-                </a:solidFill>
-                <a:latin typeface="Alegreya Sans"/>
-              </a:rPr>
-              <a:t>KPI tracking and analysis; campaign reviews; competitive watch &amp; benchmarks; media plan updates.</a:t>
-            </a:r>
-          </a:p>
-          <a:p>
-            <a:pPr algn="l">
-              <a:spcAft>
-                <a:spcPts val="100"/>
-              </a:spcAft>
-            </a:pPr>
-            <a:r>
-              <a:rPr sz="1200" b="1" i="0">
-                <a:solidFill>
-                  <a:srgbClr val="3AEDE5"/>
-                </a:solidFill>
-                <a:latin typeface="Alegreya Sans"/>
-              </a:rPr>
-              <a:t>▸ </a:t>
-            </a:r>
-            <a:r>
-              <a:rPr sz="1200" b="1" i="0">
-                <a:solidFill>
-                  <a:srgbClr val="FFFFFF"/>
-                </a:solidFill>
-                <a:latin typeface="Alegreya Sans"/>
-              </a:rPr>
-              <a:t>School project</a:t>
-            </a:r>
-            <a:r>
-              <a:rPr sz="1200" b="0" i="0">
-                <a:solidFill>
-                  <a:srgbClr val="FFFFFF"/>
-                </a:solidFill>
-                <a:latin typeface="Alegreya Sans"/>
-              </a:rPr>
-              <a:t> — E-commerce</a:t>
-            </a:r>
-            <a:r>
-              <a:rPr sz="1200" b="0" i="1">
-                <a:solidFill>
-                  <a:srgbClr val="3AEDE5"/>
-                </a:solidFill>
-                <a:latin typeface="Alegreya Sans"/>
-              </a:rPr>
-              <a:t>  (2025)</a:t>
-            </a:r>
-          </a:p>
-          <a:p>
-            <a:pPr algn="l" lvl="1">
-              <a:spcAft>
-                <a:spcPts val="100"/>
-              </a:spcAft>
-            </a:pPr>
-            <a:r>
-              <a:rPr sz="1200" b="1" i="0">
-                <a:solidFill>
-                  <a:srgbClr val="3AEDE5"/>
-                </a:solidFill>
-                <a:latin typeface="Alegreya Sans"/>
-              </a:rPr>
-              <a:t>•  </a:t>
-            </a:r>
-            <a:r>
-              <a:rPr sz="1200" b="0" i="0">
-                <a:solidFill>
-                  <a:srgbClr val="FFFFFF"/>
-                </a:solidFill>
-                <a:latin typeface="Alegreya Sans"/>
-              </a:rPr>
-              <a:t>Built a Shopify e-commerce site; UX optimisation; Mailjet newsletter; growth strategies.</a:t>
-            </a:r>
-          </a:p>
-          <a:p>
-            <a:pPr algn="l">
-              <a:spcAft>
-                <a:spcPts val="100"/>
-              </a:spcAft>
-            </a:pPr>
-            <a:r>
-              <a:rPr sz="1200" b="1" i="0">
-                <a:solidFill>
-                  <a:srgbClr val="3AEDE5"/>
-                </a:solidFill>
-                <a:latin typeface="Alegreya Sans"/>
-              </a:rPr>
-              <a:t>▸ </a:t>
-            </a:r>
-            <a:r>
-              <a:rPr sz="1200" b="1" i="0">
-                <a:solidFill>
-                  <a:srgbClr val="FFFFFF"/>
-                </a:solidFill>
-                <a:latin typeface="Alegreya Sans"/>
-              </a:rPr>
-              <a:t>Personal project</a:t>
-            </a:r>
-            <a:r>
-              <a:rPr sz="1200" b="0" i="0">
-                <a:solidFill>
-                  <a:srgbClr val="FFFFFF"/>
-                </a:solidFill>
-                <a:latin typeface="Alegreya Sans"/>
-              </a:rPr>
-              <a:t> — E-commerce</a:t>
-            </a:r>
-            <a:r>
-              <a:rPr sz="1200" b="0" i="1">
-                <a:solidFill>
-                  <a:srgbClr val="3AEDE5"/>
-                </a:solidFill>
-                <a:latin typeface="Alegreya Sans"/>
-              </a:rPr>
-              <a:t>  (2024)</a:t>
-            </a:r>
-          </a:p>
-          <a:p>
-            <a:pPr algn="l" lvl="1">
-              <a:spcAft>
-                <a:spcPts val="100"/>
-              </a:spcAft>
-            </a:pPr>
-            <a:r>
-              <a:rPr sz="1200" b="1" i="0">
-                <a:solidFill>
-                  <a:srgbClr val="3AEDE5"/>
-                </a:solidFill>
-                <a:latin typeface="Alegreya Sans"/>
-              </a:rPr>
-              <a:t>•  </a:t>
-            </a:r>
-            <a:r>
-              <a:rPr sz="1200" b="0" i="0">
-                <a:solidFill>
-                  <a:srgbClr val="FFFFFF"/>
-                </a:solidFill>
-                <a:latin typeface="Alegreya Sans"/>
-              </a:rPr>
-              <a:t>Created and ran an e-commerce site; product listings; digital ads; tracking via Google Analytics.</a:t>
-            </a:r>
-          </a:p>
-          <a:p>
-            <a:pPr algn="l">
-              <a:spcAft>
-                <a:spcPts val="100"/>
-              </a:spcAft>
-            </a:pPr>
-            <a:r>
-              <a:rPr sz="1200" b="1" i="0">
-                <a:solidFill>
-                  <a:srgbClr val="3AEDE5"/>
-                </a:solidFill>
-                <a:latin typeface="Alegreya Sans"/>
-              </a:rPr>
-              <a:t>▸ </a:t>
-            </a:r>
-            <a:r>
-              <a:rPr sz="1200" b="1" i="0">
-                <a:solidFill>
-                  <a:srgbClr val="FFFFFF"/>
-                </a:solidFill>
-                <a:latin typeface="Alegreya Sans"/>
-              </a:rPr>
-              <a:t>OMB Tourisme (Le Havre)</a:t>
-            </a:r>
-            <a:r>
-              <a:rPr sz="1200" b="0" i="0">
-                <a:solidFill>
-                  <a:srgbClr val="FFFFFF"/>
-                </a:solidFill>
-                <a:latin typeface="Alegreya Sans"/>
-              </a:rPr>
-              <a:t> — Intern — Administration &amp; Accounting</a:t>
-            </a:r>
-            <a:r>
-              <a:rPr sz="1200" b="0" i="1">
-                <a:solidFill>
-                  <a:srgbClr val="3AEDE5"/>
-                </a:solidFill>
-                <a:latin typeface="Alegreya Sans"/>
-              </a:rPr>
-              <a:t>  (2023)</a:t>
-            </a:r>
           </a:p>
         </p:txBody>
       </p:sp>

--- a/outputs/I.D._traffic_management.pptx
+++ b/outputs/I.D._traffic_management.pptx
@@ -3574,7 +3574,7 @@
                 </a:solidFill>
                 <a:latin typeface="Alegreya Sans"/>
               </a:rPr>
-              <a:t>Master Programme Grande École, Marketing…</a:t>
+              <a:t>Master Programme Grande École, Marketing &amp; IA</a:t>
             </a:r>
           </a:p>
           <a:p>
@@ -3615,7 +3615,7 @@
                 </a:solidFill>
                 <a:latin typeface="Alegreya Sans"/>
               </a:rPr>
-              <a:t>Bachelor Management International, Marke…</a:t>
+              <a:t>Bachelor Management International, Marketing Digital</a:t>
             </a:r>
           </a:p>
           <a:p>
@@ -3752,7 +3752,7 @@
                 </a:solidFill>
                 <a:latin typeface="Alegreya Sans"/>
               </a:rPr>
-              <a:t>Étudiante en Master 1 Programme Grande École (spécialisation innovation en marketing digital et IA) à l'EM Normandie Business School. Je recherche une alternance en traffic management, paid media et a…</a:t>
+              <a:t>Étudiante en Master 1 Programme Grande École (spécialisation innovation en marketing digital et IA) à l'EM Normandie Business School. Je recherche une alternance en traffic management, paid media et acquisition. Niveau B2 en anglais, rigoureuse et résiliente.</a:t>
             </a:r>
           </a:p>
           <a:p>
@@ -3839,7 +3839,7 @@
                 </a:solidFill>
                 <a:latin typeface="Alegreya Sans"/>
               </a:rPr>
-              <a:t>Lancement et optimisation de campagnes Social Ads sur Meta Ads, TikTok Ads et Pinterest Ads ; mise en place des stratégies d'acquisition sel…</a:t>
+              <a:t>Lancement et optimisation de campagnes Social Ads sur Meta Ads, TikTok Ads et Pinterest Ads ; mise en place des stratégies d'acquisition selon les objectifs clients.</a:t>
             </a:r>
           </a:p>
           <a:p>
@@ -4671,7 +4671,7 @@
                 </a:solidFill>
                 <a:latin typeface="Alegreya Sans"/>
               </a:rPr>
-              <a:t>Bachelor International Management, Digit…</a:t>
+              <a:t>Bachelor International Management, Digital Mktg</a:t>
             </a:r>
           </a:p>
           <a:p>
@@ -4808,7 +4808,7 @@
                 </a:solidFill>
                 <a:latin typeface="Alegreya Sans"/>
               </a:rPr>
-              <a:t>Master 1 Grande École student (innovation in digital marketing and AI) at EM Normandie Business School. Looking for a work-study position in traffic management, paid media and acquisition. B2 English,…</a:t>
+              <a:t>Master 1 Grande École student (innovation in digital marketing and AI) at EM Normandie Business School. Looking for a work-study position in traffic management, paid media and acquisition. B2 English, rigorous and resilient.</a:t>
             </a:r>
           </a:p>
           <a:p>
@@ -4895,7 +4895,7 @@
                 </a:solidFill>
                 <a:latin typeface="Alegreya Sans"/>
               </a:rPr>
-              <a:t>Launch and optimisation of Social Ads campaigns on Meta Ads, TikTok Ads and Pinterest Ads; client acquisition strategies aligned to business…</a:t>
+              <a:t>Launch and optimisation of Social Ads campaigns on Meta Ads, TikTok Ads and Pinterest Ads; client acquisition strategies aligned to business objectives.</a:t>
             </a:r>
           </a:p>
           <a:p>
